--- a/article/ppt/Chapter05_local.pptx
+++ b/article/ppt/Chapter05_local.pptx
@@ -12,6 +12,7 @@
     <p:sldId id="268" r:id="rId7"/>
     <p:sldId id="269" r:id="rId8"/>
     <p:sldId id="270" r:id="rId9"/>
+    <p:sldId id="271" r:id="rId13"/>
   </p:sldIdLst>
   <p:sldSz cx="9144000" cy="6858000" type="screen4x3"/>
   <p:notesSz cx="6858000" cy="9144000"/>
@@ -111,6 +112,426 @@
     </a:lvl9pPr>
   </p:defaultTextStyle>
 </p:presentation>
+</file>
+
+<file path=ppt/notesMasters/notesMaster1.xml><?xml version="1.0" encoding="utf-8"?>
+<p:notesMaster xmlns:a="http://schemas.openxmlformats.org/drawingml/2006/main" xmlns:p="http://schemas.openxmlformats.org/presentationml/2006/main" xmlns:r="http://schemas.openxmlformats.org/officeDocument/2006/relationships">
+  <p:cSld>
+    <p:bg>
+      <p:bgRef idx="1001">
+        <a:schemeClr val="bg1"/>
+      </p:bgRef>
+    </p:bg>
+    <p:spTree>
+      <p:nvGrpSpPr>
+        <p:cNvPr id="1" name=""/>
+        <p:cNvGrpSpPr/>
+        <p:nvPr/>
+      </p:nvGrpSpPr>
+      <p:grpSpPr>
+        <a:xfrm>
+          <a:off x="0" y="0"/>
+          <a:ext cx="0" cy="0"/>
+          <a:chOff x="0" y="0"/>
+          <a:chExt cx="0" cy="0"/>
+        </a:xfrm>
+      </p:grpSpPr>
+      <p:sp>
+        <p:nvSpPr>
+          <p:cNvPr id="2" name="Header Placeholder 1"/>
+          <p:cNvSpPr>
+            <a:spLocks noGrp="1"/>
+          </p:cNvSpPr>
+          <p:nvPr>
+            <p:ph type="hdr" sz="quarter"/>
+          </p:nvPr>
+        </p:nvSpPr>
+        <p:spPr>
+          <a:xfrm>
+            <a:off x="0" y="0"/>
+            <a:ext cx="2971800" cy="457200"/>
+          </a:xfrm>
+          <a:prstGeom prst="rect">
+            <a:avLst/>
+          </a:prstGeom>
+        </p:spPr>
+        <p:txBody>
+          <a:bodyPr vert="horz" lIns="91440" tIns="45720" rIns="91440" bIns="45720" rtlCol="0"/>
+          <a:lstStyle>
+            <a:lvl1pPr algn="l">
+              <a:defRPr sz="1200"/>
+            </a:lvl1pPr>
+          </a:lstStyle>
+          <a:p>
+            <a:endParaRPr lang="en-US"/>
+          </a:p>
+        </p:txBody>
+      </p:sp>
+      <p:sp>
+        <p:nvSpPr>
+          <p:cNvPr id="3" name="Date Placeholder 2"/>
+          <p:cNvSpPr>
+            <a:spLocks noGrp="1"/>
+          </p:cNvSpPr>
+          <p:nvPr>
+            <p:ph type="dt" idx="1"/>
+          </p:nvPr>
+        </p:nvSpPr>
+        <p:spPr>
+          <a:xfrm>
+            <a:off x="3884613" y="0"/>
+            <a:ext cx="2971800" cy="457200"/>
+          </a:xfrm>
+          <a:prstGeom prst="rect">
+            <a:avLst/>
+          </a:prstGeom>
+        </p:spPr>
+        <p:txBody>
+          <a:bodyPr vert="horz" lIns="91440" tIns="45720" rIns="91440" bIns="45720" rtlCol="0"/>
+          <a:lstStyle>
+            <a:lvl1pPr algn="r">
+              <a:defRPr sz="1200"/>
+            </a:lvl1pPr>
+          </a:lstStyle>
+          <a:p>
+            <a:fld id="{0F89C1C7-3DCD-1040-A9CF-14679D8B5DDD}" type="datetimeFigureOut">
+              <a:rPr lang="en-US" smtClean="0"/>
+              <a:t>10/17/16</a:t>
+            </a:fld>
+            <a:endParaRPr lang="en-US"/>
+          </a:p>
+        </p:txBody>
+      </p:sp>
+      <p:sp>
+        <p:nvSpPr>
+          <p:cNvPr id="4" name="Slide Image Placeholder 3"/>
+          <p:cNvSpPr>
+            <a:spLocks noGrp="1" noRot="1" noChangeAspect="1"/>
+          </p:cNvSpPr>
+          <p:nvPr>
+            <p:ph type="sldImg" idx="2"/>
+          </p:nvPr>
+        </p:nvSpPr>
+        <p:spPr>
+          <a:xfrm>
+            <a:off x="1143000" y="685800"/>
+            <a:ext cx="4572000" cy="3429000"/>
+          </a:xfrm>
+          <a:prstGeom prst="rect">
+            <a:avLst/>
+          </a:prstGeom>
+          <a:noFill/>
+          <a:ln w="12700">
+            <a:solidFill>
+              <a:prstClr val="black"/>
+            </a:solidFill>
+          </a:ln>
+        </p:spPr>
+        <p:txBody>
+          <a:bodyPr vert="horz" lIns="91440" tIns="45720" rIns="91440" bIns="45720" rtlCol="0" anchor="ctr"/>
+          <a:lstStyle/>
+          <a:p>
+            <a:endParaRPr lang="en-US"/>
+          </a:p>
+        </p:txBody>
+      </p:sp>
+      <p:sp>
+        <p:nvSpPr>
+          <p:cNvPr id="5" name="Notes Placeholder 4"/>
+          <p:cNvSpPr>
+            <a:spLocks noGrp="1"/>
+          </p:cNvSpPr>
+          <p:nvPr>
+            <p:ph type="body" sz="quarter" idx="3"/>
+          </p:nvPr>
+        </p:nvSpPr>
+        <p:spPr>
+          <a:xfrm>
+            <a:off x="685800" y="4343400"/>
+            <a:ext cx="5486400" cy="4114800"/>
+          </a:xfrm>
+          <a:prstGeom prst="rect">
+            <a:avLst/>
+          </a:prstGeom>
+        </p:spPr>
+        <p:txBody>
+          <a:bodyPr vert="horz" lIns="91440" tIns="45720" rIns="91440" bIns="45720" rtlCol="0"/>
+          <a:lstStyle/>
+          <a:p>
+            <a:pPr lvl="0"/>
+            <a:r>
+              <a:rPr lang="en-US" smtClean="0"/>
+              <a:t>Click to edit Master text styles</a:t>
+            </a:r>
+          </a:p>
+          <a:p>
+            <a:pPr lvl="1"/>
+            <a:r>
+              <a:rPr lang="en-US" smtClean="0"/>
+              <a:t>Second level</a:t>
+            </a:r>
+          </a:p>
+          <a:p>
+            <a:pPr lvl="2"/>
+            <a:r>
+              <a:rPr lang="en-US" smtClean="0"/>
+              <a:t>Third level</a:t>
+            </a:r>
+          </a:p>
+          <a:p>
+            <a:pPr lvl="3"/>
+            <a:r>
+              <a:rPr lang="en-US" smtClean="0"/>
+              <a:t>Fourth level</a:t>
+            </a:r>
+          </a:p>
+          <a:p>
+            <a:pPr lvl="4"/>
+            <a:r>
+              <a:rPr lang="en-US" smtClean="0"/>
+              <a:t>Fifth level</a:t>
+            </a:r>
+            <a:endParaRPr lang="en-US"/>
+          </a:p>
+        </p:txBody>
+      </p:sp>
+      <p:sp>
+        <p:nvSpPr>
+          <p:cNvPr id="6" name="Footer Placeholder 5"/>
+          <p:cNvSpPr>
+            <a:spLocks noGrp="1"/>
+          </p:cNvSpPr>
+          <p:nvPr>
+            <p:ph type="ftr" sz="quarter" idx="4"/>
+          </p:nvPr>
+        </p:nvSpPr>
+        <p:spPr>
+          <a:xfrm>
+            <a:off x="0" y="8685213"/>
+            <a:ext cx="2971800" cy="457200"/>
+          </a:xfrm>
+          <a:prstGeom prst="rect">
+            <a:avLst/>
+          </a:prstGeom>
+        </p:spPr>
+        <p:txBody>
+          <a:bodyPr vert="horz" lIns="91440" tIns="45720" rIns="91440" bIns="45720" rtlCol="0" anchor="b"/>
+          <a:lstStyle>
+            <a:lvl1pPr algn="l">
+              <a:defRPr sz="1200"/>
+            </a:lvl1pPr>
+          </a:lstStyle>
+          <a:p>
+            <a:endParaRPr lang="en-US"/>
+          </a:p>
+        </p:txBody>
+      </p:sp>
+      <p:sp>
+        <p:nvSpPr>
+          <p:cNvPr id="7" name="Slide Number Placeholder 6"/>
+          <p:cNvSpPr>
+            <a:spLocks noGrp="1"/>
+          </p:cNvSpPr>
+          <p:nvPr>
+            <p:ph type="sldNum" sz="quarter" idx="5"/>
+          </p:nvPr>
+        </p:nvSpPr>
+        <p:spPr>
+          <a:xfrm>
+            <a:off x="3884613" y="8685213"/>
+            <a:ext cx="2971800" cy="457200"/>
+          </a:xfrm>
+          <a:prstGeom prst="rect">
+            <a:avLst/>
+          </a:prstGeom>
+        </p:spPr>
+        <p:txBody>
+          <a:bodyPr vert="horz" lIns="91440" tIns="45720" rIns="91440" bIns="45720" rtlCol="0" anchor="b"/>
+          <a:lstStyle>
+            <a:lvl1pPr algn="r">
+              <a:defRPr sz="1200"/>
+            </a:lvl1pPr>
+          </a:lstStyle>
+          <a:p>
+            <a:fld id="{BB5E49A5-4136-284D-997B-48E1D791AD67}" type="slidenum">
+              <a:rPr lang="en-US" smtClean="0"/>
+              <a:t>‹#›</a:t>
+            </a:fld>
+            <a:endParaRPr lang="en-US"/>
+          </a:p>
+        </p:txBody>
+      </p:sp>
+    </p:spTree>
+    <p:extLst>
+      <p:ext uri="{BB962C8B-B14F-4D97-AF65-F5344CB8AC3E}">
+        <p14:creationId xmlns:p14="http://schemas.microsoft.com/office/powerpoint/2010/main" val="2623252185"/>
+      </p:ext>
+    </p:extLst>
+  </p:cSld>
+  <p:clrMap bg1="lt1" tx1="dk1" bg2="lt2" tx2="dk2" accent1="accent1" accent2="accent2" accent3="accent3" accent4="accent4" accent5="accent5" accent6="accent6" hlink="hlink" folHlink="folHlink"/>
+  <p:notesStyle>
+    <a:lvl1pPr marL="0" algn="l" defTabSz="457200" rtl="0" eaLnBrk="1" latinLnBrk="0" hangingPunct="1">
+      <a:defRPr sz="1200" kern="1200">
+        <a:solidFill>
+          <a:schemeClr val="tx1"/>
+        </a:solidFill>
+        <a:latin typeface="+mn-lt"/>
+        <a:ea typeface="+mn-ea"/>
+        <a:cs typeface="+mn-cs"/>
+      </a:defRPr>
+    </a:lvl1pPr>
+    <a:lvl2pPr marL="457200" algn="l" defTabSz="457200" rtl="0" eaLnBrk="1" latinLnBrk="0" hangingPunct="1">
+      <a:defRPr sz="1200" kern="1200">
+        <a:solidFill>
+          <a:schemeClr val="tx1"/>
+        </a:solidFill>
+        <a:latin typeface="+mn-lt"/>
+        <a:ea typeface="+mn-ea"/>
+        <a:cs typeface="+mn-cs"/>
+      </a:defRPr>
+    </a:lvl2pPr>
+    <a:lvl3pPr marL="914400" algn="l" defTabSz="457200" rtl="0" eaLnBrk="1" latinLnBrk="0" hangingPunct="1">
+      <a:defRPr sz="1200" kern="1200">
+        <a:solidFill>
+          <a:schemeClr val="tx1"/>
+        </a:solidFill>
+        <a:latin typeface="+mn-lt"/>
+        <a:ea typeface="+mn-ea"/>
+        <a:cs typeface="+mn-cs"/>
+      </a:defRPr>
+    </a:lvl3pPr>
+    <a:lvl4pPr marL="1371600" algn="l" defTabSz="457200" rtl="0" eaLnBrk="1" latinLnBrk="0" hangingPunct="1">
+      <a:defRPr sz="1200" kern="1200">
+        <a:solidFill>
+          <a:schemeClr val="tx1"/>
+        </a:solidFill>
+        <a:latin typeface="+mn-lt"/>
+        <a:ea typeface="+mn-ea"/>
+        <a:cs typeface="+mn-cs"/>
+      </a:defRPr>
+    </a:lvl4pPr>
+    <a:lvl5pPr marL="1828800" algn="l" defTabSz="457200" rtl="0" eaLnBrk="1" latinLnBrk="0" hangingPunct="1">
+      <a:defRPr sz="1200" kern="1200">
+        <a:solidFill>
+          <a:schemeClr val="tx1"/>
+        </a:solidFill>
+        <a:latin typeface="+mn-lt"/>
+        <a:ea typeface="+mn-ea"/>
+        <a:cs typeface="+mn-cs"/>
+      </a:defRPr>
+    </a:lvl5pPr>
+    <a:lvl6pPr marL="2286000" algn="l" defTabSz="457200" rtl="0" eaLnBrk="1" latinLnBrk="0" hangingPunct="1">
+      <a:defRPr sz="1200" kern="1200">
+        <a:solidFill>
+          <a:schemeClr val="tx1"/>
+        </a:solidFill>
+        <a:latin typeface="+mn-lt"/>
+        <a:ea typeface="+mn-ea"/>
+        <a:cs typeface="+mn-cs"/>
+      </a:defRPr>
+    </a:lvl6pPr>
+    <a:lvl7pPr marL="2743200" algn="l" defTabSz="457200" rtl="0" eaLnBrk="1" latinLnBrk="0" hangingPunct="1">
+      <a:defRPr sz="1200" kern="1200">
+        <a:solidFill>
+          <a:schemeClr val="tx1"/>
+        </a:solidFill>
+        <a:latin typeface="+mn-lt"/>
+        <a:ea typeface="+mn-ea"/>
+        <a:cs typeface="+mn-cs"/>
+      </a:defRPr>
+    </a:lvl7pPr>
+    <a:lvl8pPr marL="3200400" algn="l" defTabSz="457200" rtl="0" eaLnBrk="1" latinLnBrk="0" hangingPunct="1">
+      <a:defRPr sz="1200" kern="1200">
+        <a:solidFill>
+          <a:schemeClr val="tx1"/>
+        </a:solidFill>
+        <a:latin typeface="+mn-lt"/>
+        <a:ea typeface="+mn-ea"/>
+        <a:cs typeface="+mn-cs"/>
+      </a:defRPr>
+    </a:lvl8pPr>
+    <a:lvl9pPr marL="3657600" algn="l" defTabSz="457200" rtl="0" eaLnBrk="1" latinLnBrk="0" hangingPunct="1">
+      <a:defRPr sz="1200" kern="1200">
+        <a:solidFill>
+          <a:schemeClr val="tx1"/>
+        </a:solidFill>
+        <a:latin typeface="+mn-lt"/>
+        <a:ea typeface="+mn-ea"/>
+        <a:cs typeface="+mn-cs"/>
+      </a:defRPr>
+    </a:lvl9pPr>
+  </p:notesStyle>
+</p:notesMaster>
+</file>
+
+<file path=ppt/notesSlides/notesSlide1.xml><?xml version="1.0" encoding="utf-8"?>
+<p:notes xmlns:a="http://schemas.openxmlformats.org/drawingml/2006/main" xmlns:p="http://schemas.openxmlformats.org/presentationml/2006/main" xmlns:r="http://schemas.openxmlformats.org/officeDocument/2006/relationships">
+  <p:cSld>
+    <p:spTree>
+      <p:nvGrpSpPr>
+        <p:cNvPr id="1" name=""/>
+        <p:cNvGrpSpPr/>
+        <p:nvPr/>
+      </p:nvGrpSpPr>
+      <p:grpSpPr>
+        <a:xfrm>
+          <a:off x="0" y="0"/>
+          <a:ext cx="0" cy="0"/>
+          <a:chOff x="0" y="0"/>
+          <a:chExt cx="0" cy="0"/>
+        </a:xfrm>
+      </p:grpSpPr>
+      <p:sp>
+        <p:nvSpPr>
+          <p:cNvPr id="2" name="Slide Image Placeholder 1"/>
+          <p:cNvSpPr>
+            <a:spLocks noGrp="1"/>
+          </p:cNvSpPr>
+          <p:nvPr>
+            <p:ph type="sldImg" idx="2"/>
+          </p:nvPr>
+        </p:nvSpPr>
+        <p:spPr/>
+      </p:sp>
+      <p:sp>
+        <p:nvSpPr>
+          <p:cNvPr id="3" name="Notes Placeholder 2"/>
+          <p:cNvSpPr>
+            <a:spLocks noGrp="1"/>
+          </p:cNvSpPr>
+          <p:nvPr>
+            <p:ph type="body" idx="3" sz="quarter"/>
+          </p:nvPr>
+        </p:nvSpPr>
+        <p:spPr/>
+        <p:txBody>
+          <a:bodyPr/>
+          <a:lstStyle/>
+          <a:p>
+            <a:r>
+              <a:t>AUTOFIG:ch05_09</a:t>
+            </a:r>
+          </a:p>
+        </p:txBody>
+      </p:sp>
+      <p:sp>
+        <p:nvSpPr>
+          <p:cNvPr id="4" name="Slide Number Placeholder 3"/>
+          <p:cNvSpPr>
+            <a:spLocks noGrp="1"/>
+          </p:cNvSpPr>
+          <p:nvPr>
+            <p:ph type="sldNum" idx="5" sz="quarter"/>
+          </p:nvPr>
+        </p:nvSpPr>
+        <p:spPr/>
+      </p:sp>
+    </p:spTree>
+  </p:cSld>
+  <p:clrMapOvr>
+    <a:masterClrMapping/>
+  </p:clrMapOvr>
+</p:notes>
 </file>
 
 <file path=ppt/slideLayouts/slideLayout1.xml><?xml version="1.0" encoding="utf-8"?>
@@ -5777,6 +6198,239 @@
 </p:sld>
 </file>
 
+<file path=ppt/slides/slide8.xml><?xml version="1.0" encoding="utf-8"?>
+<p:sld xmlns:a="http://schemas.openxmlformats.org/drawingml/2006/main" xmlns:p="http://schemas.openxmlformats.org/presentationml/2006/main" xmlns:r="http://schemas.openxmlformats.org/officeDocument/2006/relationships">
+  <p:cSld>
+    <p:spTree>
+      <p:nvGrpSpPr>
+        <p:cNvPr id="1" name=""/>
+        <p:cNvGrpSpPr/>
+        <p:nvPr/>
+      </p:nvGrpSpPr>
+      <p:grpSpPr/>
+      <p:sp>
+        <p:nvSpPr>
+          <p:cNvPr id="2" name="Rectangle 1"/>
+          <p:cNvSpPr/>
+          <p:nvPr/>
+        </p:nvSpPr>
+        <p:spPr>
+          <a:xfrm>
+            <a:off x="0" y="0"/>
+            <a:ext cx="9144000" cy="6858000"/>
+          </a:xfrm>
+          <a:prstGeom prst="rect">
+            <a:avLst/>
+          </a:prstGeom>
+          <a:solidFill>
+            <a:srgbClr val="FFFFFF"/>
+          </a:solidFill>
+          <a:ln>
+            <a:noFill/>
+          </a:ln>
+          <a:effectLst/>
+        </p:spPr>
+        <p:style>
+          <a:lnRef idx="1">
+            <a:schemeClr val="accent1"/>
+          </a:lnRef>
+          <a:fillRef idx="3">
+            <a:schemeClr val="accent1"/>
+          </a:fillRef>
+          <a:effectRef idx="2">
+            <a:schemeClr val="accent1"/>
+          </a:effectRef>
+          <a:fontRef idx="minor">
+            <a:schemeClr val="lt1"/>
+          </a:fontRef>
+        </p:style>
+        <p:txBody>
+          <a:bodyPr rtlCol="0" anchor="ctr"/>
+          <a:lstStyle/>
+          <a:p>
+            <a:pPr algn="ctr"/>
+          </a:p>
+        </p:txBody>
+      </p:sp>
+      <p:pic>
+        <p:nvPicPr>
+          <p:cNvPr id="3" name="Picture 2" descr="ch05_09_a.png"/>
+          <p:cNvPicPr>
+            <a:picLocks noChangeAspect="1"/>
+          </p:cNvPicPr>
+          <p:nvPr/>
+        </p:nvPicPr>
+        <p:blipFill>
+          <a:blip r:embed="rId2"/>
+          <a:stretch>
+            <a:fillRect/>
+          </a:stretch>
+        </p:blipFill>
+        <p:spPr>
+          <a:xfrm>
+            <a:off x="228600" y="502920"/>
+            <a:ext cx="2810256" cy="2651772"/>
+          </a:xfrm>
+          <a:prstGeom prst="rect">
+            <a:avLst/>
+          </a:prstGeom>
+        </p:spPr>
+      </p:pic>
+      <p:sp>
+        <p:nvSpPr>
+          <p:cNvPr id="4" name="TextBox 3"/>
+          <p:cNvSpPr txBox="1"/>
+          <p:nvPr/>
+        </p:nvSpPr>
+        <p:spPr>
+          <a:xfrm>
+            <a:off x="274320" y="192024"/>
+            <a:ext cx="914400" cy="292608"/>
+          </a:xfrm>
+          <a:prstGeom prst="rect">
+            <a:avLst/>
+          </a:prstGeom>
+          <a:noFill/>
+        </p:spPr>
+        <p:txBody>
+          <a:bodyPr wrap="none" lIns="0" rIns="0" tIns="0" bIns="0">
+            <a:spAutoFit/>
+          </a:bodyPr>
+          <a:lstStyle/>
+          <a:p>
+            <a:r>
+              <a:rPr b="1" sz="1400">
+                <a:solidFill>
+                  <a:srgbClr val="202020"/>
+                </a:solidFill>
+              </a:rPr>
+              <a:t>(a)</a:t>
+            </a:r>
+          </a:p>
+        </p:txBody>
+      </p:sp>
+      <p:pic>
+        <p:nvPicPr>
+          <p:cNvPr id="5" name="Picture 4" descr="ch05_09_b.png"/>
+          <p:cNvPicPr>
+            <a:picLocks noChangeAspect="1"/>
+          </p:cNvPicPr>
+          <p:nvPr/>
+        </p:nvPicPr>
+        <p:blipFill>
+          <a:blip r:embed="rId3"/>
+          <a:stretch>
+            <a:fillRect/>
+          </a:stretch>
+        </p:blipFill>
+        <p:spPr>
+          <a:xfrm>
+            <a:off x="3166872" y="502920"/>
+            <a:ext cx="2810256" cy="2348644"/>
+          </a:xfrm>
+          <a:prstGeom prst="rect">
+            <a:avLst/>
+          </a:prstGeom>
+        </p:spPr>
+      </p:pic>
+      <p:sp>
+        <p:nvSpPr>
+          <p:cNvPr id="6" name="TextBox 5"/>
+          <p:cNvSpPr txBox="1"/>
+          <p:nvPr/>
+        </p:nvSpPr>
+        <p:spPr>
+          <a:xfrm>
+            <a:off x="3212592" y="192024"/>
+            <a:ext cx="914400" cy="292608"/>
+          </a:xfrm>
+          <a:prstGeom prst="rect">
+            <a:avLst/>
+          </a:prstGeom>
+          <a:noFill/>
+        </p:spPr>
+        <p:txBody>
+          <a:bodyPr wrap="none" lIns="0" rIns="0" tIns="0" bIns="0">
+            <a:spAutoFit/>
+          </a:bodyPr>
+          <a:lstStyle/>
+          <a:p>
+            <a:r>
+              <a:rPr b="1" sz="1400">
+                <a:solidFill>
+                  <a:srgbClr val="202020"/>
+                </a:solidFill>
+              </a:rPr>
+              <a:t>(b)</a:t>
+            </a:r>
+          </a:p>
+        </p:txBody>
+      </p:sp>
+      <p:pic>
+        <p:nvPicPr>
+          <p:cNvPr id="7" name="Picture 6" descr="ch05_09_c.png"/>
+          <p:cNvPicPr>
+            <a:picLocks noChangeAspect="1"/>
+          </p:cNvPicPr>
+          <p:nvPr/>
+        </p:nvPicPr>
+        <p:blipFill>
+          <a:blip r:embed="rId4"/>
+          <a:stretch>
+            <a:fillRect/>
+          </a:stretch>
+        </p:blipFill>
+        <p:spPr>
+          <a:xfrm>
+            <a:off x="6105144" y="502920"/>
+            <a:ext cx="2810256" cy="2362426"/>
+          </a:xfrm>
+          <a:prstGeom prst="rect">
+            <a:avLst/>
+          </a:prstGeom>
+        </p:spPr>
+      </p:pic>
+      <p:sp>
+        <p:nvSpPr>
+          <p:cNvPr id="8" name="TextBox 7"/>
+          <p:cNvSpPr txBox="1"/>
+          <p:nvPr/>
+        </p:nvSpPr>
+        <p:spPr>
+          <a:xfrm>
+            <a:off x="6150864" y="192024"/>
+            <a:ext cx="914400" cy="292608"/>
+          </a:xfrm>
+          <a:prstGeom prst="rect">
+            <a:avLst/>
+          </a:prstGeom>
+          <a:noFill/>
+        </p:spPr>
+        <p:txBody>
+          <a:bodyPr wrap="none" lIns="0" rIns="0" tIns="0" bIns="0">
+            <a:spAutoFit/>
+          </a:bodyPr>
+          <a:lstStyle/>
+          <a:p>
+            <a:r>
+              <a:rPr b="1" sz="1400">
+                <a:solidFill>
+                  <a:srgbClr val="202020"/>
+                </a:solidFill>
+              </a:rPr>
+              <a:t>(c)</a:t>
+            </a:r>
+          </a:p>
+        </p:txBody>
+      </p:sp>
+    </p:spTree>
+  </p:cSld>
+  <p:clrMapOvr>
+    <a:masterClrMapping/>
+  </p:clrMapOvr>
+</p:sld>
+</file>
+
 <file path=ppt/theme/theme1.xml><?xml version="1.0" encoding="utf-8"?>
 <a:theme xmlns:a="http://schemas.openxmlformats.org/drawingml/2006/main" name="WPS">
   <a:themeElements>
@@ -6026,4 +6680,324 @@
     </a:ext>
   </a:extLst>
 </a:theme>
+</file>
+
+<file path=ppt/theme/theme2.xml><?xml version="1.0" encoding="utf-8"?>
+<a:theme xmlns:a="http://schemas.openxmlformats.org/drawingml/2006/main" name="Office Theme">
+  <a:themeElements>
+    <a:clrScheme name="Office">
+      <a:dk1>
+        <a:sysClr val="windowText" lastClr="000000"/>
+      </a:dk1>
+      <a:lt1>
+        <a:sysClr val="window" lastClr="FFFFFF"/>
+      </a:lt1>
+      <a:dk2>
+        <a:srgbClr val="1F497D"/>
+      </a:dk2>
+      <a:lt2>
+        <a:srgbClr val="EEECE1"/>
+      </a:lt2>
+      <a:accent1>
+        <a:srgbClr val="4F81BD"/>
+      </a:accent1>
+      <a:accent2>
+        <a:srgbClr val="C0504D"/>
+      </a:accent2>
+      <a:accent3>
+        <a:srgbClr val="9BBB59"/>
+      </a:accent3>
+      <a:accent4>
+        <a:srgbClr val="8064A2"/>
+      </a:accent4>
+      <a:accent5>
+        <a:srgbClr val="4BACC6"/>
+      </a:accent5>
+      <a:accent6>
+        <a:srgbClr val="F79646"/>
+      </a:accent6>
+      <a:hlink>
+        <a:srgbClr val="0000FF"/>
+      </a:hlink>
+      <a:folHlink>
+        <a:srgbClr val="800080"/>
+      </a:folHlink>
+    </a:clrScheme>
+    <a:fontScheme name="Office">
+      <a:majorFont>
+        <a:latin typeface="Calibri"/>
+        <a:ea typeface=""/>
+        <a:cs typeface=""/>
+        <a:font script="Jpan" typeface="ＭＳ Ｐゴシック"/>
+        <a:font script="Hang" typeface="맑은 고딕"/>
+        <a:font script="Hans" typeface="宋体"/>
+        <a:font script="Hant" typeface="新細明體"/>
+        <a:font script="Arab" typeface="Times New Roman"/>
+        <a:font script="Hebr" typeface="Times New Roman"/>
+        <a:font script="Thai" typeface="Angsana New"/>
+        <a:font script="Ethi" typeface="Nyala"/>
+        <a:font script="Beng" typeface="Vrinda"/>
+        <a:font script="Gujr" typeface="Shruti"/>
+        <a:font script="Khmr" typeface="MoolBoran"/>
+        <a:font script="Knda" typeface="Tunga"/>
+        <a:font script="Guru" typeface="Raavi"/>
+        <a:font script="Cans" typeface="Euphemia"/>
+        <a:font script="Cher" typeface="Plantagenet Cherokee"/>
+        <a:font script="Yiii" typeface="Microsoft Yi Baiti"/>
+        <a:font script="Tibt" typeface="Microsoft Himalaya"/>
+        <a:font script="Thaa" typeface="MV Boli"/>
+        <a:font script="Deva" typeface="Mangal"/>
+        <a:font script="Telu" typeface="Gautami"/>
+        <a:font script="Taml" typeface="Latha"/>
+        <a:font script="Syrc" typeface="Estrangelo Edessa"/>
+        <a:font script="Orya" typeface="Kalinga"/>
+        <a:font script="Mlym" typeface="Kartika"/>
+        <a:font script="Laoo" typeface="DokChampa"/>
+        <a:font script="Sinh" typeface="Iskoola Pota"/>
+        <a:font script="Mong" typeface="Mongolian Baiti"/>
+        <a:font script="Viet" typeface="Times New Roman"/>
+        <a:font script="Uigh" typeface="Microsoft Uighur"/>
+        <a:font script="Geor" typeface="Sylfaen"/>
+      </a:majorFont>
+      <a:minorFont>
+        <a:latin typeface="Calibri"/>
+        <a:ea typeface=""/>
+        <a:cs typeface=""/>
+        <a:font script="Jpan" typeface="ＭＳ Ｐゴシック"/>
+        <a:font script="Hang" typeface="맑은 고딕"/>
+        <a:font script="Hans" typeface="宋体"/>
+        <a:font script="Hant" typeface="新細明體"/>
+        <a:font script="Arab" typeface="Arial"/>
+        <a:font script="Hebr" typeface="Arial"/>
+        <a:font script="Thai" typeface="Cordia New"/>
+        <a:font script="Ethi" typeface="Nyala"/>
+        <a:font script="Beng" typeface="Vrinda"/>
+        <a:font script="Gujr" typeface="Shruti"/>
+        <a:font script="Khmr" typeface="DaunPenh"/>
+        <a:font script="Knda" typeface="Tunga"/>
+        <a:font script="Guru" typeface="Raavi"/>
+        <a:font script="Cans" typeface="Euphemia"/>
+        <a:font script="Cher" typeface="Plantagenet Cherokee"/>
+        <a:font script="Yiii" typeface="Microsoft Yi Baiti"/>
+        <a:font script="Tibt" typeface="Microsoft Himalaya"/>
+        <a:font script="Thaa" typeface="MV Boli"/>
+        <a:font script="Deva" typeface="Mangal"/>
+        <a:font script="Telu" typeface="Gautami"/>
+        <a:font script="Taml" typeface="Latha"/>
+        <a:font script="Syrc" typeface="Estrangelo Edessa"/>
+        <a:font script="Orya" typeface="Kalinga"/>
+        <a:font script="Mlym" typeface="Kartika"/>
+        <a:font script="Laoo" typeface="DokChampa"/>
+        <a:font script="Sinh" typeface="Iskoola Pota"/>
+        <a:font script="Mong" typeface="Mongolian Baiti"/>
+        <a:font script="Viet" typeface="Arial"/>
+        <a:font script="Uigh" typeface="Microsoft Uighur"/>
+        <a:font script="Geor" typeface="Sylfaen"/>
+      </a:minorFont>
+    </a:fontScheme>
+    <a:fmtScheme name="Office">
+      <a:fillStyleLst>
+        <a:solidFill>
+          <a:schemeClr val="phClr"/>
+        </a:solidFill>
+        <a:gradFill rotWithShape="1">
+          <a:gsLst>
+            <a:gs pos="0">
+              <a:schemeClr val="phClr">
+                <a:tint val="50000"/>
+                <a:satMod val="300000"/>
+              </a:schemeClr>
+            </a:gs>
+            <a:gs pos="35000">
+              <a:schemeClr val="phClr">
+                <a:tint val="37000"/>
+                <a:satMod val="300000"/>
+              </a:schemeClr>
+            </a:gs>
+            <a:gs pos="100000">
+              <a:schemeClr val="phClr">
+                <a:tint val="15000"/>
+                <a:satMod val="350000"/>
+              </a:schemeClr>
+            </a:gs>
+          </a:gsLst>
+          <a:lin ang="16200000" scaled="1"/>
+        </a:gradFill>
+        <a:gradFill rotWithShape="1">
+          <a:gsLst>
+            <a:gs pos="0">
+              <a:schemeClr val="phClr">
+                <a:tint val="100000"/>
+                <a:shade val="100000"/>
+                <a:satMod val="130000"/>
+              </a:schemeClr>
+            </a:gs>
+            <a:gs pos="100000">
+              <a:schemeClr val="phClr">
+                <a:tint val="50000"/>
+                <a:shade val="100000"/>
+                <a:satMod val="350000"/>
+              </a:schemeClr>
+            </a:gs>
+          </a:gsLst>
+          <a:lin ang="16200000" scaled="0"/>
+        </a:gradFill>
+      </a:fillStyleLst>
+      <a:lnStyleLst>
+        <a:ln w="9525" cap="flat" cmpd="sng" algn="ctr">
+          <a:solidFill>
+            <a:schemeClr val="phClr">
+              <a:shade val="95000"/>
+              <a:satMod val="105000"/>
+            </a:schemeClr>
+          </a:solidFill>
+          <a:prstDash val="solid"/>
+        </a:ln>
+        <a:ln w="25400" cap="flat" cmpd="sng" algn="ctr">
+          <a:solidFill>
+            <a:schemeClr val="phClr"/>
+          </a:solidFill>
+          <a:prstDash val="solid"/>
+        </a:ln>
+        <a:ln w="38100" cap="flat" cmpd="sng" algn="ctr">
+          <a:solidFill>
+            <a:schemeClr val="phClr"/>
+          </a:solidFill>
+          <a:prstDash val="solid"/>
+        </a:ln>
+      </a:lnStyleLst>
+      <a:effectStyleLst>
+        <a:effectStyle>
+          <a:effectLst>
+            <a:outerShdw blurRad="40000" dist="20000" dir="5400000" rotWithShape="0">
+              <a:srgbClr val="000000">
+                <a:alpha val="38000"/>
+              </a:srgbClr>
+            </a:outerShdw>
+          </a:effectLst>
+        </a:effectStyle>
+        <a:effectStyle>
+          <a:effectLst>
+            <a:outerShdw blurRad="40000" dist="23000" dir="5400000" rotWithShape="0">
+              <a:srgbClr val="000000">
+                <a:alpha val="35000"/>
+              </a:srgbClr>
+            </a:outerShdw>
+          </a:effectLst>
+        </a:effectStyle>
+        <a:effectStyle>
+          <a:effectLst>
+            <a:outerShdw blurRad="40000" dist="23000" dir="5400000" rotWithShape="0">
+              <a:srgbClr val="000000">
+                <a:alpha val="35000"/>
+              </a:srgbClr>
+            </a:outerShdw>
+          </a:effectLst>
+          <a:scene3d>
+            <a:camera prst="orthographicFront">
+              <a:rot lat="0" lon="0" rev="0"/>
+            </a:camera>
+            <a:lightRig rig="threePt" dir="t">
+              <a:rot lat="0" lon="0" rev="1200000"/>
+            </a:lightRig>
+          </a:scene3d>
+          <a:sp3d>
+            <a:bevelT w="63500" h="25400"/>
+          </a:sp3d>
+        </a:effectStyle>
+      </a:effectStyleLst>
+      <a:bgFillStyleLst>
+        <a:solidFill>
+          <a:schemeClr val="phClr"/>
+        </a:solidFill>
+        <a:gradFill rotWithShape="1">
+          <a:gsLst>
+            <a:gs pos="0">
+              <a:schemeClr val="phClr">
+                <a:tint val="40000"/>
+                <a:satMod val="350000"/>
+              </a:schemeClr>
+            </a:gs>
+            <a:gs pos="40000">
+              <a:schemeClr val="phClr">
+                <a:tint val="45000"/>
+                <a:shade val="99000"/>
+                <a:satMod val="350000"/>
+              </a:schemeClr>
+            </a:gs>
+            <a:gs pos="100000">
+              <a:schemeClr val="phClr">
+                <a:shade val="20000"/>
+                <a:satMod val="255000"/>
+              </a:schemeClr>
+            </a:gs>
+          </a:gsLst>
+          <a:path path="circle">
+            <a:fillToRect l="50000" t="-80000" r="50000" b="180000"/>
+          </a:path>
+        </a:gradFill>
+        <a:gradFill rotWithShape="1">
+          <a:gsLst>
+            <a:gs pos="0">
+              <a:schemeClr val="phClr">
+                <a:tint val="80000"/>
+                <a:satMod val="300000"/>
+              </a:schemeClr>
+            </a:gs>
+            <a:gs pos="100000">
+              <a:schemeClr val="phClr">
+                <a:shade val="30000"/>
+                <a:satMod val="200000"/>
+              </a:schemeClr>
+            </a:gs>
+          </a:gsLst>
+          <a:path path="circle">
+            <a:fillToRect l="50000" t="50000" r="50000" b="50000"/>
+          </a:path>
+        </a:gradFill>
+      </a:bgFillStyleLst>
+    </a:fmtScheme>
+  </a:themeElements>
+  <a:objectDefaults>
+    <a:spDef>
+      <a:spPr/>
+      <a:bodyPr/>
+      <a:lstStyle/>
+      <a:style>
+        <a:lnRef idx="1">
+          <a:schemeClr val="accent1"/>
+        </a:lnRef>
+        <a:fillRef idx="3">
+          <a:schemeClr val="accent1"/>
+        </a:fillRef>
+        <a:effectRef idx="2">
+          <a:schemeClr val="accent1"/>
+        </a:effectRef>
+        <a:fontRef idx="minor">
+          <a:schemeClr val="lt1"/>
+        </a:fontRef>
+      </a:style>
+    </a:spDef>
+    <a:lnDef>
+      <a:spPr/>
+      <a:bodyPr/>
+      <a:lstStyle/>
+      <a:style>
+        <a:lnRef idx="2">
+          <a:schemeClr val="accent1"/>
+        </a:lnRef>
+        <a:fillRef idx="0">
+          <a:schemeClr val="accent1"/>
+        </a:fillRef>
+        <a:effectRef idx="1">
+          <a:schemeClr val="accent1"/>
+        </a:effectRef>
+        <a:fontRef idx="minor">
+          <a:schemeClr val="tx1"/>
+        </a:fontRef>
+      </a:style>
+    </a:lnDef>
+  </a:objectDefaults>
+  <a:extraClrSchemeLst/>
+</a:theme>
 </file>
--- a/article/ppt/Chapter05_local.pptx
+++ b/article/ppt/Chapter05_local.pptx
@@ -6269,7 +6269,7 @@
         <p:spPr>
           <a:xfrm>
             <a:off x="228600" y="502920"/>
-            <a:ext cx="2810256" cy="2651772"/>
+            <a:ext cx="2810256" cy="2893637"/>
           </a:xfrm>
           <a:prstGeom prst="rect">
             <a:avLst/>
@@ -6284,8 +6284,8 @@
         </p:nvSpPr>
         <p:spPr>
           <a:xfrm>
-            <a:off x="274320" y="192024"/>
-            <a:ext cx="914400" cy="292608"/>
+            <a:off x="274320" y="521208"/>
+            <a:ext cx="548640" cy="274320"/>
           </a:xfrm>
           <a:prstGeom prst="rect">
             <a:avLst/>
@@ -6326,7 +6326,7 @@
         <p:spPr>
           <a:xfrm>
             <a:off x="3166872" y="502920"/>
-            <a:ext cx="2810256" cy="2348644"/>
+            <a:ext cx="2810256" cy="2355020"/>
           </a:xfrm>
           <a:prstGeom prst="rect">
             <a:avLst/>
@@ -6341,8 +6341,8 @@
         </p:nvSpPr>
         <p:spPr>
           <a:xfrm>
-            <a:off x="3212592" y="192024"/>
-            <a:ext cx="914400" cy="292608"/>
+            <a:off x="3212592" y="521208"/>
+            <a:ext cx="548640" cy="274320"/>
           </a:xfrm>
           <a:prstGeom prst="rect">
             <a:avLst/>
@@ -6383,7 +6383,7 @@
         <p:spPr>
           <a:xfrm>
             <a:off x="6105144" y="502920"/>
-            <a:ext cx="2810256" cy="2362426"/>
+            <a:ext cx="2810256" cy="2356099"/>
           </a:xfrm>
           <a:prstGeom prst="rect">
             <a:avLst/>
@@ -6398,8 +6398,8 @@
         </p:nvSpPr>
         <p:spPr>
           <a:xfrm>
-            <a:off x="6150864" y="192024"/>
-            <a:ext cx="914400" cy="292608"/>
+            <a:off x="6150864" y="521208"/>
+            <a:ext cx="548640" cy="274320"/>
           </a:xfrm>
           <a:prstGeom prst="rect">
             <a:avLst/>

--- a/article/ppt/Chapter05_local.pptx
+++ b/article/ppt/Chapter05_local.pptx
@@ -6269,7 +6269,7 @@
         <p:spPr>
           <a:xfrm>
             <a:off x="228600" y="502920"/>
-            <a:ext cx="2810256" cy="2893637"/>
+            <a:ext cx="2810256" cy="2893454"/>
           </a:xfrm>
           <a:prstGeom prst="rect">
             <a:avLst/>
@@ -6326,7 +6326,7 @@
         <p:spPr>
           <a:xfrm>
             <a:off x="3166872" y="502920"/>
-            <a:ext cx="2810256" cy="2355020"/>
+            <a:ext cx="2810256" cy="2353716"/>
           </a:xfrm>
           <a:prstGeom prst="rect">
             <a:avLst/>
@@ -6383,7 +6383,7 @@
         <p:spPr>
           <a:xfrm>
             <a:off x="6105144" y="502920"/>
-            <a:ext cx="2810256" cy="2356099"/>
+            <a:ext cx="2810256" cy="2334805"/>
           </a:xfrm>
           <a:prstGeom prst="rect">
             <a:avLst/>

--- a/article/ppt/Chapter05_local.pptx
+++ b/article/ppt/Chapter05_local.pptx
@@ -6269,7 +6269,7 @@
         <p:spPr>
           <a:xfrm>
             <a:off x="228600" y="502920"/>
-            <a:ext cx="2810256" cy="2893454"/>
+            <a:ext cx="2810256" cy="2906201"/>
           </a:xfrm>
           <a:prstGeom prst="rect">
             <a:avLst/>
@@ -6326,7 +6326,7 @@
         <p:spPr>
           <a:xfrm>
             <a:off x="3166872" y="502920"/>
-            <a:ext cx="2810256" cy="2353716"/>
+            <a:ext cx="2810256" cy="2364386"/>
           </a:xfrm>
           <a:prstGeom prst="rect">
             <a:avLst/>
@@ -6383,7 +6383,7 @@
         <p:spPr>
           <a:xfrm>
             <a:off x="6105144" y="502920"/>
-            <a:ext cx="2810256" cy="2334805"/>
+            <a:ext cx="2810256" cy="2191802"/>
           </a:xfrm>
           <a:prstGeom prst="rect">
             <a:avLst/>

--- a/article/ppt/Chapter05_local.pptx
+++ b/article/ppt/Chapter05_local.pptx
@@ -6269,7 +6269,7 @@
         <p:spPr>
           <a:xfrm>
             <a:off x="228600" y="502920"/>
-            <a:ext cx="2810256" cy="2906201"/>
+            <a:ext cx="2810256" cy="2893454"/>
           </a:xfrm>
           <a:prstGeom prst="rect">
             <a:avLst/>
@@ -6326,7 +6326,7 @@
         <p:spPr>
           <a:xfrm>
             <a:off x="3166872" y="502920"/>
-            <a:ext cx="2810256" cy="2364386"/>
+            <a:ext cx="2810256" cy="2353716"/>
           </a:xfrm>
           <a:prstGeom prst="rect">
             <a:avLst/>
@@ -6383,7 +6383,7 @@
         <p:spPr>
           <a:xfrm>
             <a:off x="6105144" y="502920"/>
-            <a:ext cx="2810256" cy="2191802"/>
+            <a:ext cx="2810256" cy="2221130"/>
           </a:xfrm>
           <a:prstGeom prst="rect">
             <a:avLst/>

--- a/article/ppt/Chapter05_local.pptx
+++ b/article/ppt/Chapter05_local.pptx
@@ -4,6 +4,9 @@
   <p:sldMasterIdLst>
     <p:sldMasterId id="2147483648" r:id="rId1"/>
   </p:sldMasterIdLst>
+  <p:notesMasterIdLst>
+    <p:notesMasterId r:id="rId11"/>
+  </p:notesMasterIdLst>
   <p:sldIdLst>
     <p:sldId id="263" r:id="rId3"/>
     <p:sldId id="265" r:id="rId4"/>
@@ -12,7 +15,9 @@
     <p:sldId id="268" r:id="rId7"/>
     <p:sldId id="269" r:id="rId8"/>
     <p:sldId id="270" r:id="rId9"/>
-    <p:sldId id="271" r:id="rId13"/>
+    <p:sldId id="272" r:id="rId15"/>
+    <p:sldId id="271" r:id="rId10"/>
+    <p:sldId id="273" r:id="rId16"/>
   </p:sldIdLst>
   <p:sldSz cx="9144000" cy="6858000" type="screen4x3"/>
   <p:notesSz cx="6858000" cy="9144000"/>
@@ -115,7 +120,7 @@
 </file>
 
 <file path=ppt/notesMasters/notesMaster1.xml><?xml version="1.0" encoding="utf-8"?>
-<p:notesMaster xmlns:a="http://schemas.openxmlformats.org/drawingml/2006/main" xmlns:p="http://schemas.openxmlformats.org/presentationml/2006/main" xmlns:r="http://schemas.openxmlformats.org/officeDocument/2006/relationships">
+<p:notesMaster xmlns:a="http://schemas.openxmlformats.org/drawingml/2006/main" xmlns:r="http://schemas.openxmlformats.org/officeDocument/2006/relationships" xmlns:p="http://schemas.openxmlformats.org/presentationml/2006/main">
   <p:cSld>
     <p:bg>
       <p:bgRef idx="1001">
@@ -196,7 +201,6 @@
           <a:p>
             <a:fld id="{0F89C1C7-3DCD-1040-A9CF-14679D8B5DDD}" type="datetimeFigureOut">
               <a:rPr lang="en-US" smtClean="0"/>
-              <a:t>10/17/16</a:t>
             </a:fld>
             <a:endParaRPr lang="en-US"/>
           </a:p>
@@ -263,6 +267,7 @@
               <a:rPr lang="en-US" smtClean="0"/>
               <a:t>Click to edit Master text styles</a:t>
             </a:r>
+            <a:endParaRPr lang="en-US" smtClean="0"/>
           </a:p>
           <a:p>
             <a:pPr lvl="1"/>
@@ -270,6 +275,7 @@
               <a:rPr lang="en-US" smtClean="0"/>
               <a:t>Second level</a:t>
             </a:r>
+            <a:endParaRPr lang="en-US" smtClean="0"/>
           </a:p>
           <a:p>
             <a:pPr lvl="2"/>
@@ -277,6 +283,7 @@
               <a:rPr lang="en-US" smtClean="0"/>
               <a:t>Third level</a:t>
             </a:r>
+            <a:endParaRPr lang="en-US" smtClean="0"/>
           </a:p>
           <a:p>
             <a:pPr lvl="3"/>
@@ -284,6 +291,7 @@
               <a:rPr lang="en-US" smtClean="0"/>
               <a:t>Fourth level</a:t>
             </a:r>
+            <a:endParaRPr lang="en-US" smtClean="0"/>
           </a:p>
           <a:p>
             <a:pPr lvl="4"/>
@@ -355,18 +363,12 @@
           <a:p>
             <a:fld id="{BB5E49A5-4136-284D-997B-48E1D791AD67}" type="slidenum">
               <a:rPr lang="en-US" smtClean="0"/>
-              <a:t>‹#›</a:t>
             </a:fld>
             <a:endParaRPr lang="en-US"/>
           </a:p>
         </p:txBody>
       </p:sp>
     </p:spTree>
-    <p:extLst>
-      <p:ext uri="{BB962C8B-B14F-4D97-AF65-F5344CB8AC3E}">
-        <p14:creationId xmlns:p14="http://schemas.microsoft.com/office/powerpoint/2010/main" val="2623252185"/>
-      </p:ext>
-    </p:extLst>
   </p:cSld>
   <p:clrMap bg1="lt1" tx1="dk1" bg2="lt2" tx2="dk2" accent1="accent1" accent2="accent2" accent3="accent3" accent4="accent4" accent5="accent5" accent6="accent6" hlink="hlink" folHlink="folHlink"/>
   <p:notesStyle>
@@ -509,7 +511,637 @@
           <a:lstStyle/>
           <a:p>
             <a:r>
-              <a:t>AUTOFIG:ch05_09</a:t>
+              <a:t>FIG:01</a:t>
+            </a:r>
+          </a:p>
+        </p:txBody>
+      </p:sp>
+      <p:sp>
+        <p:nvSpPr>
+          <p:cNvPr id="4" name="Slide Number Placeholder 3"/>
+          <p:cNvSpPr>
+            <a:spLocks noGrp="1"/>
+          </p:cNvSpPr>
+          <p:nvPr>
+            <p:ph type="sldNum" idx="5" sz="quarter"/>
+          </p:nvPr>
+        </p:nvSpPr>
+        <p:spPr/>
+      </p:sp>
+    </p:spTree>
+  </p:cSld>
+  <p:clrMapOvr>
+    <a:masterClrMapping/>
+  </p:clrMapOvr>
+</p:notes>
+</file>
+
+<file path=ppt/notesSlides/notesSlide10.xml><?xml version="1.0" encoding="utf-8"?>
+<p:notes xmlns:a="http://schemas.openxmlformats.org/drawingml/2006/main" xmlns:p="http://schemas.openxmlformats.org/presentationml/2006/main" xmlns:r="http://schemas.openxmlformats.org/officeDocument/2006/relationships">
+  <p:cSld>
+    <p:spTree>
+      <p:nvGrpSpPr>
+        <p:cNvPr id="1" name=""/>
+        <p:cNvGrpSpPr/>
+        <p:nvPr/>
+      </p:nvGrpSpPr>
+      <p:grpSpPr>
+        <a:xfrm>
+          <a:off x="0" y="0"/>
+          <a:ext cx="0" cy="0"/>
+          <a:chOff x="0" y="0"/>
+          <a:chExt cx="0" cy="0"/>
+        </a:xfrm>
+      </p:grpSpPr>
+      <p:sp>
+        <p:nvSpPr>
+          <p:cNvPr id="2" name="Slide Image Placeholder 1"/>
+          <p:cNvSpPr>
+            <a:spLocks noGrp="1"/>
+          </p:cNvSpPr>
+          <p:nvPr>
+            <p:ph type="sldImg" idx="2"/>
+          </p:nvPr>
+        </p:nvSpPr>
+        <p:spPr/>
+      </p:sp>
+      <p:sp>
+        <p:nvSpPr>
+          <p:cNvPr id="3" name="Notes Placeholder 2"/>
+          <p:cNvSpPr>
+            <a:spLocks noGrp="1"/>
+          </p:cNvSpPr>
+          <p:nvPr>
+            <p:ph type="body" idx="3" sz="quarter"/>
+          </p:nvPr>
+        </p:nvSpPr>
+        <p:spPr/>
+        <p:txBody>
+          <a:bodyPr/>
+          <a:lstStyle/>
+          <a:p>
+            <a:r>
+              <a:t>FIG:10:VECTOR</a:t>
+            </a:r>
+          </a:p>
+        </p:txBody>
+      </p:sp>
+      <p:sp>
+        <p:nvSpPr>
+          <p:cNvPr id="4" name="Slide Number Placeholder 3"/>
+          <p:cNvSpPr>
+            <a:spLocks noGrp="1"/>
+          </p:cNvSpPr>
+          <p:nvPr>
+            <p:ph type="sldNum" idx="5" sz="quarter"/>
+          </p:nvPr>
+        </p:nvSpPr>
+        <p:spPr/>
+      </p:sp>
+    </p:spTree>
+  </p:cSld>
+  <p:clrMapOvr>
+    <a:masterClrMapping/>
+  </p:clrMapOvr>
+</p:notes>
+</file>
+
+<file path=ppt/notesSlides/notesSlide2.xml><?xml version="1.0" encoding="utf-8"?>
+<p:notes xmlns:a="http://schemas.openxmlformats.org/drawingml/2006/main" xmlns:p="http://schemas.openxmlformats.org/presentationml/2006/main" xmlns:r="http://schemas.openxmlformats.org/officeDocument/2006/relationships">
+  <p:cSld>
+    <p:spTree>
+      <p:nvGrpSpPr>
+        <p:cNvPr id="1" name=""/>
+        <p:cNvGrpSpPr/>
+        <p:nvPr/>
+      </p:nvGrpSpPr>
+      <p:grpSpPr>
+        <a:xfrm>
+          <a:off x="0" y="0"/>
+          <a:ext cx="0" cy="0"/>
+          <a:chOff x="0" y="0"/>
+          <a:chExt cx="0" cy="0"/>
+        </a:xfrm>
+      </p:grpSpPr>
+      <p:sp>
+        <p:nvSpPr>
+          <p:cNvPr id="2" name="Slide Image Placeholder 1"/>
+          <p:cNvSpPr>
+            <a:spLocks noGrp="1"/>
+          </p:cNvSpPr>
+          <p:nvPr>
+            <p:ph type="sldImg" idx="2"/>
+          </p:nvPr>
+        </p:nvSpPr>
+        <p:spPr/>
+      </p:sp>
+      <p:sp>
+        <p:nvSpPr>
+          <p:cNvPr id="3" name="Notes Placeholder 2"/>
+          <p:cNvSpPr>
+            <a:spLocks noGrp="1"/>
+          </p:cNvSpPr>
+          <p:nvPr>
+            <p:ph type="body" idx="3" sz="quarter"/>
+          </p:nvPr>
+        </p:nvSpPr>
+        <p:spPr/>
+        <p:txBody>
+          <a:bodyPr/>
+          <a:lstStyle/>
+          <a:p>
+            <a:r>
+              <a:t>FIG:02</a:t>
+            </a:r>
+          </a:p>
+        </p:txBody>
+      </p:sp>
+      <p:sp>
+        <p:nvSpPr>
+          <p:cNvPr id="4" name="Slide Number Placeholder 3"/>
+          <p:cNvSpPr>
+            <a:spLocks noGrp="1"/>
+          </p:cNvSpPr>
+          <p:nvPr>
+            <p:ph type="sldNum" idx="5" sz="quarter"/>
+          </p:nvPr>
+        </p:nvSpPr>
+        <p:spPr/>
+      </p:sp>
+    </p:spTree>
+  </p:cSld>
+  <p:clrMapOvr>
+    <a:masterClrMapping/>
+  </p:clrMapOvr>
+</p:notes>
+</file>
+
+<file path=ppt/notesSlides/notesSlide3.xml><?xml version="1.0" encoding="utf-8"?>
+<p:notes xmlns:a="http://schemas.openxmlformats.org/drawingml/2006/main" xmlns:p="http://schemas.openxmlformats.org/presentationml/2006/main" xmlns:r="http://schemas.openxmlformats.org/officeDocument/2006/relationships">
+  <p:cSld>
+    <p:spTree>
+      <p:nvGrpSpPr>
+        <p:cNvPr id="1" name=""/>
+        <p:cNvGrpSpPr/>
+        <p:nvPr/>
+      </p:nvGrpSpPr>
+      <p:grpSpPr>
+        <a:xfrm>
+          <a:off x="0" y="0"/>
+          <a:ext cx="0" cy="0"/>
+          <a:chOff x="0" y="0"/>
+          <a:chExt cx="0" cy="0"/>
+        </a:xfrm>
+      </p:grpSpPr>
+      <p:sp>
+        <p:nvSpPr>
+          <p:cNvPr id="2" name="Slide Image Placeholder 1"/>
+          <p:cNvSpPr>
+            <a:spLocks noGrp="1"/>
+          </p:cNvSpPr>
+          <p:nvPr>
+            <p:ph type="sldImg" idx="2"/>
+          </p:nvPr>
+        </p:nvSpPr>
+        <p:spPr/>
+      </p:sp>
+      <p:sp>
+        <p:nvSpPr>
+          <p:cNvPr id="3" name="Notes Placeholder 2"/>
+          <p:cNvSpPr>
+            <a:spLocks noGrp="1"/>
+          </p:cNvSpPr>
+          <p:nvPr>
+            <p:ph type="body" idx="3" sz="quarter"/>
+          </p:nvPr>
+        </p:nvSpPr>
+        <p:spPr/>
+        <p:txBody>
+          <a:bodyPr/>
+          <a:lstStyle/>
+          <a:p>
+            <a:r>
+              <a:t>FIG:03</a:t>
+            </a:r>
+          </a:p>
+        </p:txBody>
+      </p:sp>
+      <p:sp>
+        <p:nvSpPr>
+          <p:cNvPr id="4" name="Slide Number Placeholder 3"/>
+          <p:cNvSpPr>
+            <a:spLocks noGrp="1"/>
+          </p:cNvSpPr>
+          <p:nvPr>
+            <p:ph type="sldNum" idx="5" sz="quarter"/>
+          </p:nvPr>
+        </p:nvSpPr>
+        <p:spPr/>
+      </p:sp>
+    </p:spTree>
+  </p:cSld>
+  <p:clrMapOvr>
+    <a:masterClrMapping/>
+  </p:clrMapOvr>
+</p:notes>
+</file>
+
+<file path=ppt/notesSlides/notesSlide4.xml><?xml version="1.0" encoding="utf-8"?>
+<p:notes xmlns:a="http://schemas.openxmlformats.org/drawingml/2006/main" xmlns:p="http://schemas.openxmlformats.org/presentationml/2006/main" xmlns:r="http://schemas.openxmlformats.org/officeDocument/2006/relationships">
+  <p:cSld>
+    <p:spTree>
+      <p:nvGrpSpPr>
+        <p:cNvPr id="1" name=""/>
+        <p:cNvGrpSpPr/>
+        <p:nvPr/>
+      </p:nvGrpSpPr>
+      <p:grpSpPr>
+        <a:xfrm>
+          <a:off x="0" y="0"/>
+          <a:ext cx="0" cy="0"/>
+          <a:chOff x="0" y="0"/>
+          <a:chExt cx="0" cy="0"/>
+        </a:xfrm>
+      </p:grpSpPr>
+      <p:sp>
+        <p:nvSpPr>
+          <p:cNvPr id="2" name="Slide Image Placeholder 1"/>
+          <p:cNvSpPr>
+            <a:spLocks noGrp="1"/>
+          </p:cNvSpPr>
+          <p:nvPr>
+            <p:ph type="sldImg" idx="2"/>
+          </p:nvPr>
+        </p:nvSpPr>
+        <p:spPr/>
+      </p:sp>
+      <p:sp>
+        <p:nvSpPr>
+          <p:cNvPr id="3" name="Notes Placeholder 2"/>
+          <p:cNvSpPr>
+            <a:spLocks noGrp="1"/>
+          </p:cNvSpPr>
+          <p:nvPr>
+            <p:ph type="body" idx="3" sz="quarter"/>
+          </p:nvPr>
+        </p:nvSpPr>
+        <p:spPr/>
+        <p:txBody>
+          <a:bodyPr/>
+          <a:lstStyle/>
+          <a:p>
+            <a:r>
+              <a:t>FIG:04</a:t>
+            </a:r>
+          </a:p>
+        </p:txBody>
+      </p:sp>
+      <p:sp>
+        <p:nvSpPr>
+          <p:cNvPr id="4" name="Slide Number Placeholder 3"/>
+          <p:cNvSpPr>
+            <a:spLocks noGrp="1"/>
+          </p:cNvSpPr>
+          <p:nvPr>
+            <p:ph type="sldNum" idx="5" sz="quarter"/>
+          </p:nvPr>
+        </p:nvSpPr>
+        <p:spPr/>
+      </p:sp>
+    </p:spTree>
+  </p:cSld>
+  <p:clrMapOvr>
+    <a:masterClrMapping/>
+  </p:clrMapOvr>
+</p:notes>
+</file>
+
+<file path=ppt/notesSlides/notesSlide5.xml><?xml version="1.0" encoding="utf-8"?>
+<p:notes xmlns:a="http://schemas.openxmlformats.org/drawingml/2006/main" xmlns:p="http://schemas.openxmlformats.org/presentationml/2006/main" xmlns:r="http://schemas.openxmlformats.org/officeDocument/2006/relationships">
+  <p:cSld>
+    <p:spTree>
+      <p:nvGrpSpPr>
+        <p:cNvPr id="1" name=""/>
+        <p:cNvGrpSpPr/>
+        <p:nvPr/>
+      </p:nvGrpSpPr>
+      <p:grpSpPr>
+        <a:xfrm>
+          <a:off x="0" y="0"/>
+          <a:ext cx="0" cy="0"/>
+          <a:chOff x="0" y="0"/>
+          <a:chExt cx="0" cy="0"/>
+        </a:xfrm>
+      </p:grpSpPr>
+      <p:sp>
+        <p:nvSpPr>
+          <p:cNvPr id="2" name="Slide Image Placeholder 1"/>
+          <p:cNvSpPr>
+            <a:spLocks noGrp="1"/>
+          </p:cNvSpPr>
+          <p:nvPr>
+            <p:ph type="sldImg" idx="2"/>
+          </p:nvPr>
+        </p:nvSpPr>
+        <p:spPr/>
+      </p:sp>
+      <p:sp>
+        <p:nvSpPr>
+          <p:cNvPr id="3" name="Notes Placeholder 2"/>
+          <p:cNvSpPr>
+            <a:spLocks noGrp="1"/>
+          </p:cNvSpPr>
+          <p:nvPr>
+            <p:ph type="body" idx="3" sz="quarter"/>
+          </p:nvPr>
+        </p:nvSpPr>
+        <p:spPr/>
+        <p:txBody>
+          <a:bodyPr/>
+          <a:lstStyle/>
+          <a:p>
+            <a:r>
+              <a:t>FIG:05</a:t>
+            </a:r>
+          </a:p>
+        </p:txBody>
+      </p:sp>
+      <p:sp>
+        <p:nvSpPr>
+          <p:cNvPr id="4" name="Slide Number Placeholder 3"/>
+          <p:cNvSpPr>
+            <a:spLocks noGrp="1"/>
+          </p:cNvSpPr>
+          <p:nvPr>
+            <p:ph type="sldNum" idx="5" sz="quarter"/>
+          </p:nvPr>
+        </p:nvSpPr>
+        <p:spPr/>
+      </p:sp>
+    </p:spTree>
+  </p:cSld>
+  <p:clrMapOvr>
+    <a:masterClrMapping/>
+  </p:clrMapOvr>
+</p:notes>
+</file>
+
+<file path=ppt/notesSlides/notesSlide6.xml><?xml version="1.0" encoding="utf-8"?>
+<p:notes xmlns:a="http://schemas.openxmlformats.org/drawingml/2006/main" xmlns:p="http://schemas.openxmlformats.org/presentationml/2006/main" xmlns:r="http://schemas.openxmlformats.org/officeDocument/2006/relationships">
+  <p:cSld>
+    <p:spTree>
+      <p:nvGrpSpPr>
+        <p:cNvPr id="1" name=""/>
+        <p:cNvGrpSpPr/>
+        <p:nvPr/>
+      </p:nvGrpSpPr>
+      <p:grpSpPr>
+        <a:xfrm>
+          <a:off x="0" y="0"/>
+          <a:ext cx="0" cy="0"/>
+          <a:chOff x="0" y="0"/>
+          <a:chExt cx="0" cy="0"/>
+        </a:xfrm>
+      </p:grpSpPr>
+      <p:sp>
+        <p:nvSpPr>
+          <p:cNvPr id="2" name="Slide Image Placeholder 1"/>
+          <p:cNvSpPr>
+            <a:spLocks noGrp="1"/>
+          </p:cNvSpPr>
+          <p:nvPr>
+            <p:ph type="sldImg" idx="2"/>
+          </p:nvPr>
+        </p:nvSpPr>
+        <p:spPr/>
+      </p:sp>
+      <p:sp>
+        <p:nvSpPr>
+          <p:cNvPr id="3" name="Notes Placeholder 2"/>
+          <p:cNvSpPr>
+            <a:spLocks noGrp="1"/>
+          </p:cNvSpPr>
+          <p:nvPr>
+            <p:ph type="body" idx="3" sz="quarter"/>
+          </p:nvPr>
+        </p:nvSpPr>
+        <p:spPr/>
+        <p:txBody>
+          <a:bodyPr/>
+          <a:lstStyle/>
+          <a:p>
+            <a:r>
+              <a:t>FIG:06</a:t>
+            </a:r>
+          </a:p>
+        </p:txBody>
+      </p:sp>
+      <p:sp>
+        <p:nvSpPr>
+          <p:cNvPr id="4" name="Slide Number Placeholder 3"/>
+          <p:cNvSpPr>
+            <a:spLocks noGrp="1"/>
+          </p:cNvSpPr>
+          <p:nvPr>
+            <p:ph type="sldNum" idx="5" sz="quarter"/>
+          </p:nvPr>
+        </p:nvSpPr>
+        <p:spPr/>
+      </p:sp>
+    </p:spTree>
+  </p:cSld>
+  <p:clrMapOvr>
+    <a:masterClrMapping/>
+  </p:clrMapOvr>
+</p:notes>
+</file>
+
+<file path=ppt/notesSlides/notesSlide7.xml><?xml version="1.0" encoding="utf-8"?>
+<p:notes xmlns:a="http://schemas.openxmlformats.org/drawingml/2006/main" xmlns:p="http://schemas.openxmlformats.org/presentationml/2006/main" xmlns:r="http://schemas.openxmlformats.org/officeDocument/2006/relationships">
+  <p:cSld>
+    <p:spTree>
+      <p:nvGrpSpPr>
+        <p:cNvPr id="1" name=""/>
+        <p:cNvGrpSpPr/>
+        <p:nvPr/>
+      </p:nvGrpSpPr>
+      <p:grpSpPr>
+        <a:xfrm>
+          <a:off x="0" y="0"/>
+          <a:ext cx="0" cy="0"/>
+          <a:chOff x="0" y="0"/>
+          <a:chExt cx="0" cy="0"/>
+        </a:xfrm>
+      </p:grpSpPr>
+      <p:sp>
+        <p:nvSpPr>
+          <p:cNvPr id="2" name="Slide Image Placeholder 1"/>
+          <p:cNvSpPr>
+            <a:spLocks noGrp="1"/>
+          </p:cNvSpPr>
+          <p:nvPr>
+            <p:ph type="sldImg" idx="2"/>
+          </p:nvPr>
+        </p:nvSpPr>
+        <p:spPr/>
+      </p:sp>
+      <p:sp>
+        <p:nvSpPr>
+          <p:cNvPr id="3" name="Notes Placeholder 2"/>
+          <p:cNvSpPr>
+            <a:spLocks noGrp="1"/>
+          </p:cNvSpPr>
+          <p:nvPr>
+            <p:ph type="body" idx="3" sz="quarter"/>
+          </p:nvPr>
+        </p:nvSpPr>
+        <p:spPr/>
+        <p:txBody>
+          <a:bodyPr/>
+          <a:lstStyle/>
+          <a:p>
+            <a:r>
+              <a:t>FIG:07</a:t>
+            </a:r>
+          </a:p>
+        </p:txBody>
+      </p:sp>
+      <p:sp>
+        <p:nvSpPr>
+          <p:cNvPr id="4" name="Slide Number Placeholder 3"/>
+          <p:cNvSpPr>
+            <a:spLocks noGrp="1"/>
+          </p:cNvSpPr>
+          <p:nvPr>
+            <p:ph type="sldNum" idx="5" sz="quarter"/>
+          </p:nvPr>
+        </p:nvSpPr>
+        <p:spPr/>
+      </p:sp>
+    </p:spTree>
+  </p:cSld>
+  <p:clrMapOvr>
+    <a:masterClrMapping/>
+  </p:clrMapOvr>
+</p:notes>
+</file>
+
+<file path=ppt/notesSlides/notesSlide8.xml><?xml version="1.0" encoding="utf-8"?>
+<p:notes xmlns:a="http://schemas.openxmlformats.org/drawingml/2006/main" xmlns:p="http://schemas.openxmlformats.org/presentationml/2006/main" xmlns:r="http://schemas.openxmlformats.org/officeDocument/2006/relationships">
+  <p:cSld>
+    <p:spTree>
+      <p:nvGrpSpPr>
+        <p:cNvPr id="1" name=""/>
+        <p:cNvGrpSpPr/>
+        <p:nvPr/>
+      </p:nvGrpSpPr>
+      <p:grpSpPr>
+        <a:xfrm>
+          <a:off x="0" y="0"/>
+          <a:ext cx="0" cy="0"/>
+          <a:chOff x="0" y="0"/>
+          <a:chExt cx="0" cy="0"/>
+        </a:xfrm>
+      </p:grpSpPr>
+      <p:sp>
+        <p:nvSpPr>
+          <p:cNvPr id="2" name="Slide Image Placeholder 1"/>
+          <p:cNvSpPr>
+            <a:spLocks noGrp="1"/>
+          </p:cNvSpPr>
+          <p:nvPr>
+            <p:ph type="sldImg" idx="2"/>
+          </p:nvPr>
+        </p:nvSpPr>
+        <p:spPr/>
+      </p:sp>
+      <p:sp>
+        <p:nvSpPr>
+          <p:cNvPr id="3" name="Notes Placeholder 2"/>
+          <p:cNvSpPr>
+            <a:spLocks noGrp="1"/>
+          </p:cNvSpPr>
+          <p:nvPr>
+            <p:ph type="body" idx="3" sz="quarter"/>
+          </p:nvPr>
+        </p:nvSpPr>
+        <p:spPr/>
+        <p:txBody>
+          <a:bodyPr/>
+          <a:lstStyle/>
+          <a:p>
+            <a:r>
+              <a:t>FIG:09</a:t>
+            </a:r>
+          </a:p>
+        </p:txBody>
+      </p:sp>
+      <p:sp>
+        <p:nvSpPr>
+          <p:cNvPr id="4" name="Slide Number Placeholder 3"/>
+          <p:cNvSpPr>
+            <a:spLocks noGrp="1"/>
+          </p:cNvSpPr>
+          <p:nvPr>
+            <p:ph type="sldNum" idx="5" sz="quarter"/>
+          </p:nvPr>
+        </p:nvSpPr>
+        <p:spPr/>
+      </p:sp>
+    </p:spTree>
+  </p:cSld>
+  <p:clrMapOvr>
+    <a:masterClrMapping/>
+  </p:clrMapOvr>
+</p:notes>
+</file>
+
+<file path=ppt/notesSlides/notesSlide9.xml><?xml version="1.0" encoding="utf-8"?>
+<p:notes xmlns:a="http://schemas.openxmlformats.org/drawingml/2006/main" xmlns:p="http://schemas.openxmlformats.org/presentationml/2006/main" xmlns:r="http://schemas.openxmlformats.org/officeDocument/2006/relationships">
+  <p:cSld>
+    <p:spTree>
+      <p:nvGrpSpPr>
+        <p:cNvPr id="1" name=""/>
+        <p:cNvGrpSpPr/>
+        <p:nvPr/>
+      </p:nvGrpSpPr>
+      <p:grpSpPr>
+        <a:xfrm>
+          <a:off x="0" y="0"/>
+          <a:ext cx="0" cy="0"/>
+          <a:chOff x="0" y="0"/>
+          <a:chExt cx="0" cy="0"/>
+        </a:xfrm>
+      </p:grpSpPr>
+      <p:sp>
+        <p:nvSpPr>
+          <p:cNvPr id="2" name="Slide Image Placeholder 1"/>
+          <p:cNvSpPr>
+            <a:spLocks noGrp="1"/>
+          </p:cNvSpPr>
+          <p:nvPr>
+            <p:ph type="sldImg" idx="2"/>
+          </p:nvPr>
+        </p:nvSpPr>
+        <p:spPr/>
+      </p:sp>
+      <p:sp>
+        <p:nvSpPr>
+          <p:cNvPr id="3" name="Notes Placeholder 2"/>
+          <p:cNvSpPr>
+            <a:spLocks noGrp="1"/>
+          </p:cNvSpPr>
+          <p:nvPr>
+            <p:ph type="body" idx="3" sz="quarter"/>
+          </p:nvPr>
+        </p:nvSpPr>
+        <p:spPr/>
+        <p:txBody>
+          <a:bodyPr/>
+          <a:lstStyle/>
+          <a:p>
+            <a:r>
+              <a:t>FIG:08:VECTOR</a:t>
             </a:r>
           </a:p>
         </p:txBody>
@@ -3683,6 +4315,92 @@
 </p:sld>
 </file>
 
+<file path=ppt/slides/slide10.xml><?xml version="1.0" encoding="utf-8"?>
+<p:sld xmlns:a="http://schemas.openxmlformats.org/drawingml/2006/main" xmlns:p="http://schemas.openxmlformats.org/presentationml/2006/main" xmlns:r="http://schemas.openxmlformats.org/officeDocument/2006/relationships">
+  <p:cSld>
+    <p:spTree>
+      <p:nvGrpSpPr>
+        <p:cNvPr id="1" name=""/>
+        <p:cNvGrpSpPr/>
+        <p:nvPr/>
+      </p:nvGrpSpPr>
+      <p:grpSpPr/>
+      <p:sp>
+        <p:nvSpPr>
+          <p:cNvPr id="2" name="Rectangle 1"/>
+          <p:cNvSpPr/>
+          <p:nvPr/>
+        </p:nvSpPr>
+        <p:spPr>
+          <a:xfrm>
+            <a:off x="0" y="0"/>
+            <a:ext cx="9144000" cy="6858000"/>
+          </a:xfrm>
+          <a:prstGeom prst="rect">
+            <a:avLst/>
+          </a:prstGeom>
+          <a:solidFill>
+            <a:srgbClr val="FFFFFF"/>
+          </a:solidFill>
+          <a:ln>
+            <a:noFill/>
+          </a:ln>
+          <a:effectLst/>
+        </p:spPr>
+        <p:style>
+          <a:lnRef idx="1">
+            <a:schemeClr val="accent1"/>
+          </a:lnRef>
+          <a:fillRef idx="3">
+            <a:schemeClr val="accent1"/>
+          </a:fillRef>
+          <a:effectRef idx="2">
+            <a:schemeClr val="accent1"/>
+          </a:effectRef>
+          <a:fontRef idx="minor">
+            <a:schemeClr val="lt1"/>
+          </a:fontRef>
+        </p:style>
+        <p:txBody>
+          <a:bodyPr rtlCol="0" anchor="ctr"/>
+          <a:lstStyle/>
+          <a:p>
+            <a:pPr algn="ctr"/>
+          </a:p>
+        </p:txBody>
+      </p:sp>
+      <p:pic>
+        <p:nvPicPr>
+          <p:cNvPr id="3" name="Picture 2" descr="Chapter05_local_10.png"/>
+          <p:cNvPicPr>
+            <a:picLocks noChangeAspect="1"/>
+          </p:cNvPicPr>
+          <p:nvPr/>
+        </p:nvPicPr>
+        <p:blipFill>
+          <a:blip r:embed="rId2"/>
+          <a:stretch>
+            <a:fillRect/>
+          </a:stretch>
+        </p:blipFill>
+        <p:spPr>
+          <a:xfrm>
+            <a:off x="228600" y="502920"/>
+            <a:ext cx="8686800" cy="4252583"/>
+          </a:xfrm>
+          <a:prstGeom prst="rect">
+            <a:avLst/>
+          </a:prstGeom>
+        </p:spPr>
+      </p:pic>
+    </p:spTree>
+  </p:cSld>
+  <p:clrMapOvr>
+    <a:masterClrMapping/>
+  </p:clrMapOvr>
+</p:sld>
+</file>
+
 <file path=ppt/slides/slide2.xml><?xml version="1.0" encoding="utf-8"?>
 <p:sld xmlns:a="http://schemas.openxmlformats.org/drawingml/2006/main" xmlns:r="http://schemas.openxmlformats.org/officeDocument/2006/relationships" xmlns:p="http://schemas.openxmlformats.org/presentationml/2006/main">
   <p:cSld>
@@ -5468,7 +6186,7 @@
           <p:spPr>
             <a:xfrm>
               <a:off x="0" y="1007"/>
-              <a:ext cx="14400" cy="9531"/>
+              <a:ext cx="14400" cy="10277"/>
             </a:xfrm>
             <a:prstGeom prst="rect">
               <a:avLst/>
@@ -6423,6 +7141,92 @@
           </a:p>
         </p:txBody>
       </p:sp>
+    </p:spTree>
+  </p:cSld>
+  <p:clrMapOvr>
+    <a:masterClrMapping/>
+  </p:clrMapOvr>
+</p:sld>
+</file>
+
+<file path=ppt/slides/slide9.xml><?xml version="1.0" encoding="utf-8"?>
+<p:sld xmlns:a="http://schemas.openxmlformats.org/drawingml/2006/main" xmlns:p="http://schemas.openxmlformats.org/presentationml/2006/main" xmlns:r="http://schemas.openxmlformats.org/officeDocument/2006/relationships">
+  <p:cSld>
+    <p:spTree>
+      <p:nvGrpSpPr>
+        <p:cNvPr id="1" name=""/>
+        <p:cNvGrpSpPr/>
+        <p:nvPr/>
+      </p:nvGrpSpPr>
+      <p:grpSpPr/>
+      <p:sp>
+        <p:nvSpPr>
+          <p:cNvPr id="2" name="Rectangle 1"/>
+          <p:cNvSpPr/>
+          <p:nvPr/>
+        </p:nvSpPr>
+        <p:spPr>
+          <a:xfrm>
+            <a:off x="0" y="0"/>
+            <a:ext cx="9144000" cy="6858000"/>
+          </a:xfrm>
+          <a:prstGeom prst="rect">
+            <a:avLst/>
+          </a:prstGeom>
+          <a:solidFill>
+            <a:srgbClr val="FFFFFF"/>
+          </a:solidFill>
+          <a:ln>
+            <a:noFill/>
+          </a:ln>
+          <a:effectLst/>
+        </p:spPr>
+        <p:style>
+          <a:lnRef idx="1">
+            <a:schemeClr val="accent1"/>
+          </a:lnRef>
+          <a:fillRef idx="3">
+            <a:schemeClr val="accent1"/>
+          </a:fillRef>
+          <a:effectRef idx="2">
+            <a:schemeClr val="accent1"/>
+          </a:effectRef>
+          <a:fontRef idx="minor">
+            <a:schemeClr val="lt1"/>
+          </a:fontRef>
+        </p:style>
+        <p:txBody>
+          <a:bodyPr rtlCol="0" anchor="ctr"/>
+          <a:lstStyle/>
+          <a:p>
+            <a:pPr algn="ctr"/>
+          </a:p>
+        </p:txBody>
+      </p:sp>
+      <p:pic>
+        <p:nvPicPr>
+          <p:cNvPr id="3" name="Picture 2" descr="Chapter05_local_08.png"/>
+          <p:cNvPicPr>
+            <a:picLocks noChangeAspect="1"/>
+          </p:cNvPicPr>
+          <p:nvPr/>
+        </p:nvPicPr>
+        <p:blipFill>
+          <a:blip r:embed="rId2"/>
+          <a:stretch>
+            <a:fillRect/>
+          </a:stretch>
+        </p:blipFill>
+        <p:spPr>
+          <a:xfrm>
+            <a:off x="228600" y="502920"/>
+            <a:ext cx="8686800" cy="4540827"/>
+          </a:xfrm>
+          <a:prstGeom prst="rect">
+            <a:avLst/>
+          </a:prstGeom>
+        </p:spPr>
+      </p:pic>
     </p:spTree>
   </p:cSld>
   <p:clrMapOvr>
@@ -6998,6 +7802,10 @@
       </a:style>
     </a:lnDef>
   </a:objectDefaults>
-  <a:extraClrSchemeLst/>
+  <a:extLst>
+    <a:ext uri="{05A4C25C-085E-4340-85A3-A5531E510DB2}">
+      <thm15:themeFamily xmlns:thm15="http://schemas.microsoft.com/office/thememl/2012/main" name="Office Theme" id="{62F939B6-93AF-4DB8-9C6B-D6C7DFDC589F}" vid="{4A3C46E8-61CC-4603-A589-7422A47A8E4A}"/>
+    </a:ext>
+  </a:extLst>
 </a:theme>
 </file>
--- a/article/ppt/Chapter05_local.pptx
+++ b/article/ppt/Chapter05_local.pptx
@@ -5,19 +5,19 @@
     <p:sldMasterId id="2147483648" r:id="rId1"/>
   </p:sldMasterIdLst>
   <p:notesMasterIdLst>
-    <p:notesMasterId r:id="rId11"/>
+    <p:notesMasterId r:id="rId4"/>
   </p:notesMasterIdLst>
   <p:sldIdLst>
     <p:sldId id="263" r:id="rId3"/>
-    <p:sldId id="265" r:id="rId4"/>
-    <p:sldId id="266" r:id="rId5"/>
-    <p:sldId id="267" r:id="rId6"/>
-    <p:sldId id="268" r:id="rId7"/>
-    <p:sldId id="269" r:id="rId8"/>
-    <p:sldId id="270" r:id="rId9"/>
-    <p:sldId id="272" r:id="rId15"/>
-    <p:sldId id="271" r:id="rId10"/>
-    <p:sldId id="273" r:id="rId16"/>
+    <p:sldId id="265" r:id="rId5"/>
+    <p:sldId id="266" r:id="rId6"/>
+    <p:sldId id="267" r:id="rId7"/>
+    <p:sldId id="268" r:id="rId8"/>
+    <p:sldId id="269" r:id="rId9"/>
+    <p:sldId id="270" r:id="rId10"/>
+    <p:sldId id="272" r:id="rId11"/>
+    <p:sldId id="271" r:id="rId12"/>
+    <p:sldId id="273" r:id="rId13"/>
   </p:sldIdLst>
   <p:sldSz cx="9144000" cy="6858000" type="screen4x3"/>
   <p:notesSz cx="6858000" cy="9144000"/>
@@ -467,7 +467,7 @@
 </file>
 
 <file path=ppt/notesSlides/notesSlide1.xml><?xml version="1.0" encoding="utf-8"?>
-<p:notes xmlns:a="http://schemas.openxmlformats.org/drawingml/2006/main" xmlns:p="http://schemas.openxmlformats.org/presentationml/2006/main" xmlns:r="http://schemas.openxmlformats.org/officeDocument/2006/relationships">
+<p:notes xmlns:a="http://schemas.openxmlformats.org/drawingml/2006/main" xmlns:r="http://schemas.openxmlformats.org/officeDocument/2006/relationships" xmlns:p="http://schemas.openxmlformats.org/presentationml/2006/main">
   <p:cSld>
     <p:spTree>
       <p:nvGrpSpPr>
@@ -502,7 +502,7 @@
             <a:spLocks noGrp="1"/>
           </p:cNvSpPr>
           <p:nvPr>
-            <p:ph type="body" idx="3" sz="quarter"/>
+            <p:ph type="body" sz="quarter" idx="3"/>
           </p:nvPr>
         </p:nvSpPr>
         <p:spPr/>
@@ -523,7 +523,7 @@
             <a:spLocks noGrp="1"/>
           </p:cNvSpPr>
           <p:nvPr>
-            <p:ph type="sldNum" idx="5" sz="quarter"/>
+            <p:ph type="sldNum" sz="quarter" idx="5"/>
           </p:nvPr>
         </p:nvSpPr>
         <p:spPr/>
@@ -537,7 +537,7 @@
 </file>
 
 <file path=ppt/notesSlides/notesSlide10.xml><?xml version="1.0" encoding="utf-8"?>
-<p:notes xmlns:a="http://schemas.openxmlformats.org/drawingml/2006/main" xmlns:p="http://schemas.openxmlformats.org/presentationml/2006/main" xmlns:r="http://schemas.openxmlformats.org/officeDocument/2006/relationships">
+<p:notes xmlns:a="http://schemas.openxmlformats.org/drawingml/2006/main" xmlns:r="http://schemas.openxmlformats.org/officeDocument/2006/relationships" xmlns:p="http://schemas.openxmlformats.org/presentationml/2006/main">
   <p:cSld>
     <p:spTree>
       <p:nvGrpSpPr>
@@ -572,7 +572,7 @@
             <a:spLocks noGrp="1"/>
           </p:cNvSpPr>
           <p:nvPr>
-            <p:ph type="body" idx="3" sz="quarter"/>
+            <p:ph type="body" sz="quarter" idx="3"/>
           </p:nvPr>
         </p:nvSpPr>
         <p:spPr/>
@@ -593,7 +593,7 @@
             <a:spLocks noGrp="1"/>
           </p:cNvSpPr>
           <p:nvPr>
-            <p:ph type="sldNum" idx="5" sz="quarter"/>
+            <p:ph type="sldNum" sz="quarter" idx="5"/>
           </p:nvPr>
         </p:nvSpPr>
         <p:spPr/>
@@ -607,7 +607,7 @@
 </file>
 
 <file path=ppt/notesSlides/notesSlide2.xml><?xml version="1.0" encoding="utf-8"?>
-<p:notes xmlns:a="http://schemas.openxmlformats.org/drawingml/2006/main" xmlns:p="http://schemas.openxmlformats.org/presentationml/2006/main" xmlns:r="http://schemas.openxmlformats.org/officeDocument/2006/relationships">
+<p:notes xmlns:a="http://schemas.openxmlformats.org/drawingml/2006/main" xmlns:r="http://schemas.openxmlformats.org/officeDocument/2006/relationships" xmlns:p="http://schemas.openxmlformats.org/presentationml/2006/main">
   <p:cSld>
     <p:spTree>
       <p:nvGrpSpPr>
@@ -642,7 +642,7 @@
             <a:spLocks noGrp="1"/>
           </p:cNvSpPr>
           <p:nvPr>
-            <p:ph type="body" idx="3" sz="quarter"/>
+            <p:ph type="body" sz="quarter" idx="3"/>
           </p:nvPr>
         </p:nvSpPr>
         <p:spPr/>
@@ -663,7 +663,7 @@
             <a:spLocks noGrp="1"/>
           </p:cNvSpPr>
           <p:nvPr>
-            <p:ph type="sldNum" idx="5" sz="quarter"/>
+            <p:ph type="sldNum" sz="quarter" idx="5"/>
           </p:nvPr>
         </p:nvSpPr>
         <p:spPr/>
@@ -677,7 +677,7 @@
 </file>
 
 <file path=ppt/notesSlides/notesSlide3.xml><?xml version="1.0" encoding="utf-8"?>
-<p:notes xmlns:a="http://schemas.openxmlformats.org/drawingml/2006/main" xmlns:p="http://schemas.openxmlformats.org/presentationml/2006/main" xmlns:r="http://schemas.openxmlformats.org/officeDocument/2006/relationships">
+<p:notes xmlns:a="http://schemas.openxmlformats.org/drawingml/2006/main" xmlns:r="http://schemas.openxmlformats.org/officeDocument/2006/relationships" xmlns:p="http://schemas.openxmlformats.org/presentationml/2006/main">
   <p:cSld>
     <p:spTree>
       <p:nvGrpSpPr>
@@ -712,7 +712,7 @@
             <a:spLocks noGrp="1"/>
           </p:cNvSpPr>
           <p:nvPr>
-            <p:ph type="body" idx="3" sz="quarter"/>
+            <p:ph type="body" sz="quarter" idx="3"/>
           </p:nvPr>
         </p:nvSpPr>
         <p:spPr/>
@@ -733,7 +733,7 @@
             <a:spLocks noGrp="1"/>
           </p:cNvSpPr>
           <p:nvPr>
-            <p:ph type="sldNum" idx="5" sz="quarter"/>
+            <p:ph type="sldNum" sz="quarter" idx="5"/>
           </p:nvPr>
         </p:nvSpPr>
         <p:spPr/>
@@ -747,7 +747,7 @@
 </file>
 
 <file path=ppt/notesSlides/notesSlide4.xml><?xml version="1.0" encoding="utf-8"?>
-<p:notes xmlns:a="http://schemas.openxmlformats.org/drawingml/2006/main" xmlns:p="http://schemas.openxmlformats.org/presentationml/2006/main" xmlns:r="http://schemas.openxmlformats.org/officeDocument/2006/relationships">
+<p:notes xmlns:a="http://schemas.openxmlformats.org/drawingml/2006/main" xmlns:r="http://schemas.openxmlformats.org/officeDocument/2006/relationships" xmlns:p="http://schemas.openxmlformats.org/presentationml/2006/main">
   <p:cSld>
     <p:spTree>
       <p:nvGrpSpPr>
@@ -782,7 +782,7 @@
             <a:spLocks noGrp="1"/>
           </p:cNvSpPr>
           <p:nvPr>
-            <p:ph type="body" idx="3" sz="quarter"/>
+            <p:ph type="body" sz="quarter" idx="3"/>
           </p:nvPr>
         </p:nvSpPr>
         <p:spPr/>
@@ -803,7 +803,7 @@
             <a:spLocks noGrp="1"/>
           </p:cNvSpPr>
           <p:nvPr>
-            <p:ph type="sldNum" idx="5" sz="quarter"/>
+            <p:ph type="sldNum" sz="quarter" idx="5"/>
           </p:nvPr>
         </p:nvSpPr>
         <p:spPr/>
@@ -817,7 +817,7 @@
 </file>
 
 <file path=ppt/notesSlides/notesSlide5.xml><?xml version="1.0" encoding="utf-8"?>
-<p:notes xmlns:a="http://schemas.openxmlformats.org/drawingml/2006/main" xmlns:p="http://schemas.openxmlformats.org/presentationml/2006/main" xmlns:r="http://schemas.openxmlformats.org/officeDocument/2006/relationships">
+<p:notes xmlns:a="http://schemas.openxmlformats.org/drawingml/2006/main" xmlns:r="http://schemas.openxmlformats.org/officeDocument/2006/relationships" xmlns:p="http://schemas.openxmlformats.org/presentationml/2006/main">
   <p:cSld>
     <p:spTree>
       <p:nvGrpSpPr>
@@ -852,7 +852,7 @@
             <a:spLocks noGrp="1"/>
           </p:cNvSpPr>
           <p:nvPr>
-            <p:ph type="body" idx="3" sz="quarter"/>
+            <p:ph type="body" sz="quarter" idx="3"/>
           </p:nvPr>
         </p:nvSpPr>
         <p:spPr/>
@@ -873,7 +873,7 @@
             <a:spLocks noGrp="1"/>
           </p:cNvSpPr>
           <p:nvPr>
-            <p:ph type="sldNum" idx="5" sz="quarter"/>
+            <p:ph type="sldNum" sz="quarter" idx="5"/>
           </p:nvPr>
         </p:nvSpPr>
         <p:spPr/>
@@ -887,7 +887,7 @@
 </file>
 
 <file path=ppt/notesSlides/notesSlide6.xml><?xml version="1.0" encoding="utf-8"?>
-<p:notes xmlns:a="http://schemas.openxmlformats.org/drawingml/2006/main" xmlns:p="http://schemas.openxmlformats.org/presentationml/2006/main" xmlns:r="http://schemas.openxmlformats.org/officeDocument/2006/relationships">
+<p:notes xmlns:a="http://schemas.openxmlformats.org/drawingml/2006/main" xmlns:r="http://schemas.openxmlformats.org/officeDocument/2006/relationships" xmlns:p="http://schemas.openxmlformats.org/presentationml/2006/main">
   <p:cSld>
     <p:spTree>
       <p:nvGrpSpPr>
@@ -922,7 +922,7 @@
             <a:spLocks noGrp="1"/>
           </p:cNvSpPr>
           <p:nvPr>
-            <p:ph type="body" idx="3" sz="quarter"/>
+            <p:ph type="body" sz="quarter" idx="3"/>
           </p:nvPr>
         </p:nvSpPr>
         <p:spPr/>
@@ -943,7 +943,7 @@
             <a:spLocks noGrp="1"/>
           </p:cNvSpPr>
           <p:nvPr>
-            <p:ph type="sldNum" idx="5" sz="quarter"/>
+            <p:ph type="sldNum" sz="quarter" idx="5"/>
           </p:nvPr>
         </p:nvSpPr>
         <p:spPr/>
@@ -957,7 +957,7 @@
 </file>
 
 <file path=ppt/notesSlides/notesSlide7.xml><?xml version="1.0" encoding="utf-8"?>
-<p:notes xmlns:a="http://schemas.openxmlformats.org/drawingml/2006/main" xmlns:p="http://schemas.openxmlformats.org/presentationml/2006/main" xmlns:r="http://schemas.openxmlformats.org/officeDocument/2006/relationships">
+<p:notes xmlns:a="http://schemas.openxmlformats.org/drawingml/2006/main" xmlns:r="http://schemas.openxmlformats.org/officeDocument/2006/relationships" xmlns:p="http://schemas.openxmlformats.org/presentationml/2006/main">
   <p:cSld>
     <p:spTree>
       <p:nvGrpSpPr>
@@ -992,7 +992,7 @@
             <a:spLocks noGrp="1"/>
           </p:cNvSpPr>
           <p:nvPr>
-            <p:ph type="body" idx="3" sz="quarter"/>
+            <p:ph type="body" sz="quarter" idx="3"/>
           </p:nvPr>
         </p:nvSpPr>
         <p:spPr/>
@@ -1013,7 +1013,7 @@
             <a:spLocks noGrp="1"/>
           </p:cNvSpPr>
           <p:nvPr>
-            <p:ph type="sldNum" idx="5" sz="quarter"/>
+            <p:ph type="sldNum" sz="quarter" idx="5"/>
           </p:nvPr>
         </p:nvSpPr>
         <p:spPr/>
@@ -1027,7 +1027,7 @@
 </file>
 
 <file path=ppt/notesSlides/notesSlide8.xml><?xml version="1.0" encoding="utf-8"?>
-<p:notes xmlns:a="http://schemas.openxmlformats.org/drawingml/2006/main" xmlns:p="http://schemas.openxmlformats.org/presentationml/2006/main" xmlns:r="http://schemas.openxmlformats.org/officeDocument/2006/relationships">
+<p:notes xmlns:a="http://schemas.openxmlformats.org/drawingml/2006/main" xmlns:r="http://schemas.openxmlformats.org/officeDocument/2006/relationships" xmlns:p="http://schemas.openxmlformats.org/presentationml/2006/main">
   <p:cSld>
     <p:spTree>
       <p:nvGrpSpPr>
@@ -1062,7 +1062,7 @@
             <a:spLocks noGrp="1"/>
           </p:cNvSpPr>
           <p:nvPr>
-            <p:ph type="body" idx="3" sz="quarter"/>
+            <p:ph type="body" sz="quarter" idx="3"/>
           </p:nvPr>
         </p:nvSpPr>
         <p:spPr/>
@@ -1071,7 +1071,7 @@
           <a:lstStyle/>
           <a:p>
             <a:r>
-              <a:t>FIG:09</a:t>
+              <a:t>FIG:08:VECTOR</a:t>
             </a:r>
           </a:p>
         </p:txBody>
@@ -1083,7 +1083,7 @@
             <a:spLocks noGrp="1"/>
           </p:cNvSpPr>
           <p:nvPr>
-            <p:ph type="sldNum" idx="5" sz="quarter"/>
+            <p:ph type="sldNum" sz="quarter" idx="5"/>
           </p:nvPr>
         </p:nvSpPr>
         <p:spPr/>
@@ -1097,7 +1097,7 @@
 </file>
 
 <file path=ppt/notesSlides/notesSlide9.xml><?xml version="1.0" encoding="utf-8"?>
-<p:notes xmlns:a="http://schemas.openxmlformats.org/drawingml/2006/main" xmlns:p="http://schemas.openxmlformats.org/presentationml/2006/main" xmlns:r="http://schemas.openxmlformats.org/officeDocument/2006/relationships">
+<p:notes xmlns:a="http://schemas.openxmlformats.org/drawingml/2006/main" xmlns:r="http://schemas.openxmlformats.org/officeDocument/2006/relationships" xmlns:p="http://schemas.openxmlformats.org/presentationml/2006/main">
   <p:cSld>
     <p:spTree>
       <p:nvGrpSpPr>
@@ -1132,7 +1132,7 @@
             <a:spLocks noGrp="1"/>
           </p:cNvSpPr>
           <p:nvPr>
-            <p:ph type="body" idx="3" sz="quarter"/>
+            <p:ph type="body" sz="quarter" idx="3"/>
           </p:nvPr>
         </p:nvSpPr>
         <p:spPr/>
@@ -1141,7 +1141,7 @@
           <a:lstStyle/>
           <a:p>
             <a:r>
-              <a:t>FIG:08:VECTOR</a:t>
+              <a:t>FIG:09</a:t>
             </a:r>
           </a:p>
         </p:txBody>
@@ -1153,7 +1153,7 @@
             <a:spLocks noGrp="1"/>
           </p:cNvSpPr>
           <p:nvPr>
-            <p:ph type="sldNum" idx="5" sz="quarter"/>
+            <p:ph type="sldNum" sz="quarter" idx="5"/>
           </p:nvPr>
         </p:nvSpPr>
         <p:spPr/>
@@ -3973,186 +3973,30 @@
         <p:nvPr/>
       </p:nvGrpSpPr>
       <p:grpSpPr/>
-      <p:grpSp>
-        <p:nvGrpSpPr>
-          <p:cNvPr id="10" name="组合 9"/>
-          <p:cNvGrpSpPr/>
+      <p:pic>
+        <p:nvPicPr>
+          <p:cNvPr id="11" name="图片 10" descr="05_reservoir_computing_principle"/>
+          <p:cNvPicPr>
+            <a:picLocks noChangeAspect="1"/>
+          </p:cNvPicPr>
           <p:nvPr/>
-        </p:nvGrpSpPr>
-        <p:grpSpPr>
-          <a:xfrm>
-            <a:off x="216535" y="329565"/>
-            <a:ext cx="8926830" cy="6313170"/>
-            <a:chOff x="341" y="519"/>
-            <a:chExt cx="14058" cy="9942"/>
-          </a:xfrm>
-        </p:grpSpPr>
-        <p:pic>
-          <p:nvPicPr>
-            <p:cNvPr id="3" name="图片 2" descr="ch05_principle"/>
-            <p:cNvPicPr>
-              <a:picLocks noChangeAspect="1"/>
-            </p:cNvPicPr>
-            <p:nvPr/>
-          </p:nvPicPr>
-          <p:blipFill>
-            <a:blip r:embed="rId1"/>
-            <a:stretch>
-              <a:fillRect/>
-            </a:stretch>
-          </p:blipFill>
-          <p:spPr>
-            <a:xfrm>
-              <a:off x="341" y="519"/>
-              <a:ext cx="14059" cy="9943"/>
-            </a:xfrm>
-            <a:prstGeom prst="rect">
-              <a:avLst/>
-            </a:prstGeom>
-          </p:spPr>
-        </p:pic>
-        <p:sp>
-          <p:nvSpPr>
-            <p:cNvPr id="2" name="矩形 1"/>
-            <p:cNvSpPr/>
-            <p:nvPr/>
-          </p:nvSpPr>
-          <p:spPr>
-            <a:xfrm>
-              <a:off x="1119" y="5620"/>
-              <a:ext cx="230" cy="285"/>
-            </a:xfrm>
-            <a:prstGeom prst="rect">
-              <a:avLst/>
-            </a:prstGeom>
-            <a:solidFill>
-              <a:schemeClr val="bg1"/>
-            </a:solidFill>
-            <a:ln>
-              <a:solidFill>
-                <a:schemeClr val="bg1"/>
-              </a:solidFill>
-            </a:ln>
-          </p:spPr>
-          <p:style>
-            <a:lnRef idx="2">
-              <a:schemeClr val="accent1">
-                <a:lumMod val="75000"/>
-              </a:schemeClr>
-            </a:lnRef>
-            <a:fillRef idx="1">
-              <a:schemeClr val="accent1"/>
-            </a:fillRef>
-            <a:effectRef idx="0">
-              <a:srgbClr val="FFFFFF"/>
-            </a:effectRef>
-            <a:fontRef idx="minor">
-              <a:schemeClr val="lt1"/>
-            </a:fontRef>
-          </p:style>
-          <p:txBody>
-            <a:bodyPr rtlCol="0" anchor="ctr"/>
-            <a:p>
-              <a:pPr algn="ctr"/>
-              <a:endParaRPr lang="zh-CN" altLang="en-US"/>
-            </a:p>
-          </p:txBody>
-        </p:sp>
-        <p:sp>
-          <p:nvSpPr>
-            <p:cNvPr id="4" name="矩形 3"/>
-            <p:cNvSpPr/>
-            <p:nvPr/>
-          </p:nvSpPr>
-          <p:spPr>
-            <a:xfrm>
-              <a:off x="6137" y="5620"/>
-              <a:ext cx="230" cy="285"/>
-            </a:xfrm>
-            <a:prstGeom prst="rect">
-              <a:avLst/>
-            </a:prstGeom>
-            <a:solidFill>
-              <a:schemeClr val="bg1"/>
-            </a:solidFill>
-            <a:ln>
-              <a:solidFill>
-                <a:schemeClr val="bg1"/>
-              </a:solidFill>
-            </a:ln>
-          </p:spPr>
-          <p:style>
-            <a:lnRef idx="2">
-              <a:schemeClr val="accent1">
-                <a:lumMod val="75000"/>
-              </a:schemeClr>
-            </a:lnRef>
-            <a:fillRef idx="1">
-              <a:schemeClr val="accent1"/>
-            </a:fillRef>
-            <a:effectRef idx="0">
-              <a:srgbClr val="FFFFFF"/>
-            </a:effectRef>
-            <a:fontRef idx="minor">
-              <a:schemeClr val="lt1"/>
-            </a:fontRef>
-          </p:style>
-          <p:txBody>
-            <a:bodyPr rtlCol="0" anchor="ctr"/>
-            <a:p>
-              <a:pPr algn="ctr"/>
-              <a:endParaRPr lang="zh-CN" altLang="en-US"/>
-            </a:p>
-          </p:txBody>
-        </p:sp>
-        <p:sp>
-          <p:nvSpPr>
-            <p:cNvPr id="5" name="矩形 4"/>
-            <p:cNvSpPr/>
-            <p:nvPr/>
-          </p:nvSpPr>
-          <p:spPr>
-            <a:xfrm>
-              <a:off x="11218" y="5620"/>
-              <a:ext cx="304" cy="285"/>
-            </a:xfrm>
-            <a:prstGeom prst="rect">
-              <a:avLst/>
-            </a:prstGeom>
-            <a:solidFill>
-              <a:schemeClr val="bg1"/>
-            </a:solidFill>
-            <a:ln>
-              <a:solidFill>
-                <a:schemeClr val="bg1"/>
-              </a:solidFill>
-            </a:ln>
-          </p:spPr>
-          <p:style>
-            <a:lnRef idx="2">
-              <a:schemeClr val="accent1">
-                <a:lumMod val="75000"/>
-              </a:schemeClr>
-            </a:lnRef>
-            <a:fillRef idx="1">
-              <a:schemeClr val="accent1"/>
-            </a:fillRef>
-            <a:effectRef idx="0">
-              <a:srgbClr val="FFFFFF"/>
-            </a:effectRef>
-            <a:fontRef idx="minor">
-              <a:schemeClr val="lt1"/>
-            </a:fontRef>
-          </p:style>
-          <p:txBody>
-            <a:bodyPr rtlCol="0" anchor="ctr"/>
-            <a:p>
-              <a:pPr algn="ctr"/>
-              <a:endParaRPr lang="zh-CN" altLang="en-US"/>
-            </a:p>
-          </p:txBody>
-        </p:sp>
-      </p:grpSp>
+        </p:nvPicPr>
+        <p:blipFill>
+          <a:blip r:embed="rId1"/>
+          <a:stretch>
+            <a:fillRect/>
+          </a:stretch>
+        </p:blipFill>
+        <p:spPr>
+          <a:xfrm>
+            <a:off x="176530" y="342900"/>
+            <a:ext cx="8967470" cy="6342380"/>
+          </a:xfrm>
+          <a:prstGeom prst="rect">
+            <a:avLst/>
+          </a:prstGeom>
+        </p:spPr>
+      </p:pic>
       <p:sp>
         <p:nvSpPr>
           <p:cNvPr id="6" name="文本框 5"/>
@@ -4161,7 +4005,7 @@
         </p:nvSpPr>
         <p:spPr>
           <a:xfrm>
-            <a:off x="3070701" y="3412966"/>
+            <a:off x="3070701" y="3430111"/>
             <a:ext cx="466249" cy="328613"/>
           </a:xfrm>
           <a:prstGeom prst="rect">
@@ -4170,23 +4014,15 @@
           <a:noFill/>
         </p:spPr>
         <p:txBody>
-          <a:bodyPr wrap="square" rtlCol="0">
+          <a:bodyPr wrap="none" rtlCol="0">
             <a:noAutofit/>
           </a:bodyPr>
           <a:p>
             <a:r>
-              <a:rPr lang="en-US" altLang="zh-CN" b="1">
-                <a:latin typeface="Arial" panose="020B0604020202020204" pitchFamily="34" charset="0"/>
-                <a:cs typeface="Arial" panose="020B0604020202020204" pitchFamily="34" charset="0"/>
+              <a:rPr b="1">
+                <a:latin typeface="Arial"/>
               </a:rPr>
-              <a:t>(</a:t>
-            </a:r>
-            <a:r>
-              <a:rPr lang="en-US" altLang="zh-CN" b="1">
-                <a:latin typeface="Arial" panose="020B0604020202020204" pitchFamily="34" charset="0"/>
-                <a:cs typeface="Arial" panose="020B0604020202020204" pitchFamily="34" charset="0"/>
-              </a:rPr>
-              <a:t>c)</a:t>
+              <a:t>(c)</a:t>
             </a:r>
             <a:endParaRPr lang="en-US" altLang="zh-CN" b="1">
               <a:latin typeface="Arial" panose="020B0604020202020204" pitchFamily="34" charset="0"/>
@@ -4203,7 +4039,7 @@
         </p:nvSpPr>
         <p:spPr>
           <a:xfrm>
-            <a:off x="6222841" y="3412331"/>
+            <a:off x="6222841" y="3429476"/>
             <a:ext cx="466249" cy="328613"/>
           </a:xfrm>
           <a:prstGeom prst="rect">
@@ -4212,23 +4048,15 @@
           <a:noFill/>
         </p:spPr>
         <p:txBody>
-          <a:bodyPr wrap="square" rtlCol="0">
+          <a:bodyPr wrap="none" rtlCol="0">
             <a:noAutofit/>
           </a:bodyPr>
           <a:p>
             <a:r>
-              <a:rPr lang="en-US" altLang="zh-CN" b="1">
-                <a:latin typeface="Arial" panose="020B0604020202020204" pitchFamily="34" charset="0"/>
-                <a:cs typeface="Arial" panose="020B0604020202020204" pitchFamily="34" charset="0"/>
+              <a:rPr b="1">
+                <a:latin typeface="Arial"/>
               </a:rPr>
-              <a:t>(</a:t>
-            </a:r>
-            <a:r>
-              <a:rPr lang="en-US" altLang="zh-CN" b="1">
-                <a:latin typeface="Arial" panose="020B0604020202020204" pitchFamily="34" charset="0"/>
-                <a:cs typeface="Arial" panose="020B0604020202020204" pitchFamily="34" charset="0"/>
-              </a:rPr>
-              <a:t>d)</a:t>
+              <a:t>(d)</a:t>
             </a:r>
             <a:endParaRPr lang="en-US" altLang="zh-CN" b="1">
               <a:latin typeface="Arial" panose="020B0604020202020204" pitchFamily="34" charset="0"/>
@@ -4245,7 +4073,7 @@
         </p:nvSpPr>
         <p:spPr>
           <a:xfrm>
-            <a:off x="-61754" y="3412966"/>
+            <a:off x="-90329" y="3430111"/>
             <a:ext cx="466249" cy="328613"/>
           </a:xfrm>
           <a:prstGeom prst="rect">
@@ -4254,14 +4082,13 @@
           <a:noFill/>
         </p:spPr>
         <p:txBody>
-          <a:bodyPr wrap="square" rtlCol="0">
+          <a:bodyPr wrap="none" rtlCol="0">
             <a:noAutofit/>
           </a:bodyPr>
           <a:p>
             <a:r>
-              <a:rPr lang="en-US" altLang="zh-CN" b="1">
-                <a:latin typeface="Arial" panose="020B0604020202020204" pitchFamily="34" charset="0"/>
-                <a:cs typeface="Arial" panose="020B0604020202020204" pitchFamily="34" charset="0"/>
+              <a:rPr b="1">
+                <a:latin typeface="Arial"/>
               </a:rPr>
               <a:t>(b)</a:t>
             </a:r>
@@ -4280,7 +4107,7 @@
         </p:nvSpPr>
         <p:spPr>
           <a:xfrm>
-            <a:off x="-61754" y="229711"/>
+            <a:off x="-90329" y="229711"/>
             <a:ext cx="466249" cy="328613"/>
           </a:xfrm>
           <a:prstGeom prst="rect">
@@ -4289,14 +4116,13 @@
           <a:noFill/>
         </p:spPr>
         <p:txBody>
-          <a:bodyPr wrap="square" rtlCol="0">
+          <a:bodyPr wrap="none" rtlCol="0">
             <a:noAutofit/>
           </a:bodyPr>
           <a:p>
             <a:r>
-              <a:rPr lang="en-US" altLang="zh-CN" b="1">
-                <a:latin typeface="Arial" panose="020B0604020202020204" pitchFamily="34" charset="0"/>
-                <a:cs typeface="Arial" panose="020B0604020202020204" pitchFamily="34" charset="0"/>
+              <a:rPr b="1">
+                <a:latin typeface="Arial"/>
               </a:rPr>
               <a:t>(a)</a:t>
             </a:r>
@@ -4316,7 +4142,7 @@
 </file>
 
 <file path=ppt/slides/slide10.xml><?xml version="1.0" encoding="utf-8"?>
-<p:sld xmlns:a="http://schemas.openxmlformats.org/drawingml/2006/main" xmlns:p="http://schemas.openxmlformats.org/presentationml/2006/main" xmlns:r="http://schemas.openxmlformats.org/officeDocument/2006/relationships">
+<p:sld xmlns:a="http://schemas.openxmlformats.org/drawingml/2006/main" xmlns:r="http://schemas.openxmlformats.org/officeDocument/2006/relationships" xmlns:p="http://schemas.openxmlformats.org/presentationml/2006/main">
   <p:cSld>
     <p:spTree>
       <p:nvGrpSpPr>
@@ -4378,15 +4204,16 @@
           <p:nvPr/>
         </p:nvPicPr>
         <p:blipFill>
-          <a:blip r:embed="rId2"/>
+          <a:blip r:embed="rId1"/>
+          <a:srcRect t="13409"/>
           <a:stretch>
             <a:fillRect/>
           </a:stretch>
         </p:blipFill>
         <p:spPr>
           <a:xfrm>
-            <a:off x="228600" y="502920"/>
-            <a:ext cx="8686800" cy="4252583"/>
+            <a:off x="228600" y="1073150"/>
+            <a:ext cx="8686800" cy="3682365"/>
           </a:xfrm>
           <a:prstGeom prst="rect">
             <a:avLst/>
@@ -4750,14 +4577,13 @@
           <a:noFill/>
         </p:spPr>
         <p:txBody>
-          <a:bodyPr wrap="square" rtlCol="0">
+          <a:bodyPr wrap="none" rtlCol="0">
             <a:noAutofit/>
           </a:bodyPr>
           <a:p>
             <a:r>
-              <a:rPr lang="en-US" altLang="zh-CN" sz="1200" b="1">
-                <a:latin typeface="Arial" panose="020B0604020202020204" pitchFamily="34" charset="0"/>
-                <a:cs typeface="Arial" panose="020B0604020202020204" pitchFamily="34" charset="0"/>
+              <a:rPr b="1" sz="1200">
+                <a:latin typeface="Arial"/>
               </a:rPr>
               <a:t>(a)</a:t>
             </a:r>
@@ -4785,23 +4611,15 @@
           <a:noFill/>
         </p:spPr>
         <p:txBody>
-          <a:bodyPr wrap="square" rtlCol="0">
+          <a:bodyPr wrap="none" rtlCol="0">
             <a:noAutofit/>
           </a:bodyPr>
           <a:p>
             <a:r>
-              <a:rPr lang="en-US" altLang="zh-CN" sz="1200" b="1">
-                <a:latin typeface="Arial" panose="020B0604020202020204" pitchFamily="34" charset="0"/>
-                <a:cs typeface="Arial" panose="020B0604020202020204" pitchFamily="34" charset="0"/>
+              <a:rPr b="1" sz="1200">
+                <a:latin typeface="Arial"/>
               </a:rPr>
-              <a:t>(</a:t>
-            </a:r>
-            <a:r>
-              <a:rPr lang="en-US" altLang="zh-CN" sz="1200" b="1">
-                <a:latin typeface="Arial" panose="020B0604020202020204" pitchFamily="34" charset="0"/>
-                <a:cs typeface="Arial" panose="020B0604020202020204" pitchFamily="34" charset="0"/>
-              </a:rPr>
-              <a:t>b)</a:t>
+              <a:t>(b)</a:t>
             </a:r>
             <a:endParaRPr lang="en-US" altLang="zh-CN" sz="1200" b="1">
               <a:latin typeface="Arial" panose="020B0604020202020204" pitchFamily="34" charset="0"/>
@@ -4827,23 +4645,15 @@
           <a:noFill/>
         </p:spPr>
         <p:txBody>
-          <a:bodyPr wrap="square" rtlCol="0">
+          <a:bodyPr wrap="none" rtlCol="0">
             <a:noAutofit/>
           </a:bodyPr>
           <a:p>
             <a:r>
-              <a:rPr lang="en-US" altLang="zh-CN" sz="1200" b="1">
-                <a:latin typeface="Arial" panose="020B0604020202020204" pitchFamily="34" charset="0"/>
-                <a:cs typeface="Arial" panose="020B0604020202020204" pitchFamily="34" charset="0"/>
+              <a:rPr b="1" sz="1200">
+                <a:latin typeface="Arial"/>
               </a:rPr>
-              <a:t>(</a:t>
-            </a:r>
-            <a:r>
-              <a:rPr lang="en-US" altLang="zh-CN" sz="1200" b="1">
-                <a:latin typeface="Arial" panose="020B0604020202020204" pitchFamily="34" charset="0"/>
-                <a:cs typeface="Arial" panose="020B0604020202020204" pitchFamily="34" charset="0"/>
-              </a:rPr>
-              <a:t>c)</a:t>
+              <a:t>(c)</a:t>
             </a:r>
             <a:endParaRPr lang="en-US" altLang="zh-CN" sz="1200" b="1">
               <a:latin typeface="Arial" panose="020B0604020202020204" pitchFamily="34" charset="0"/>
@@ -4869,23 +4679,15 @@
           <a:noFill/>
         </p:spPr>
         <p:txBody>
-          <a:bodyPr wrap="square" rtlCol="0">
+          <a:bodyPr wrap="none" rtlCol="0">
             <a:noAutofit/>
           </a:bodyPr>
           <a:p>
             <a:r>
-              <a:rPr lang="en-US" altLang="zh-CN" sz="1200" b="1">
-                <a:latin typeface="Arial" panose="020B0604020202020204" pitchFamily="34" charset="0"/>
-                <a:cs typeface="Arial" panose="020B0604020202020204" pitchFamily="34" charset="0"/>
+              <a:rPr b="1" sz="1200">
+                <a:latin typeface="Arial"/>
               </a:rPr>
-              <a:t>(</a:t>
-            </a:r>
-            <a:r>
-              <a:rPr lang="en-US" altLang="zh-CN" sz="1200" b="1">
-                <a:latin typeface="Arial" panose="020B0604020202020204" pitchFamily="34" charset="0"/>
-                <a:cs typeface="Arial" panose="020B0604020202020204" pitchFamily="34" charset="0"/>
-              </a:rPr>
-              <a:t>d)</a:t>
+              <a:t>(d)</a:t>
             </a:r>
             <a:endParaRPr lang="en-US" altLang="zh-CN" sz="1200" b="1">
               <a:latin typeface="Arial" panose="020B0604020202020204" pitchFamily="34" charset="0"/>
@@ -4911,23 +4713,15 @@
           <a:noFill/>
         </p:spPr>
         <p:txBody>
-          <a:bodyPr wrap="square" rtlCol="0">
+          <a:bodyPr wrap="none" rtlCol="0">
             <a:noAutofit/>
           </a:bodyPr>
           <a:p>
             <a:r>
-              <a:rPr lang="en-US" altLang="zh-CN" sz="1200" b="1">
-                <a:latin typeface="Arial" panose="020B0604020202020204" pitchFamily="34" charset="0"/>
-                <a:cs typeface="Arial" panose="020B0604020202020204" pitchFamily="34" charset="0"/>
+              <a:rPr b="1" sz="1200">
+                <a:latin typeface="Arial"/>
               </a:rPr>
-              <a:t>(</a:t>
-            </a:r>
-            <a:r>
-              <a:rPr lang="en-US" altLang="zh-CN" sz="1200" b="1">
-                <a:latin typeface="Arial" panose="020B0604020202020204" pitchFamily="34" charset="0"/>
-                <a:cs typeface="Arial" panose="020B0604020202020204" pitchFamily="34" charset="0"/>
-              </a:rPr>
-              <a:t>e)</a:t>
+              <a:t>(e)</a:t>
             </a:r>
             <a:endParaRPr lang="en-US" altLang="zh-CN" sz="1200" b="1">
               <a:latin typeface="Arial" panose="020B0604020202020204" pitchFamily="34" charset="0"/>
@@ -4953,23 +4747,15 @@
           <a:noFill/>
         </p:spPr>
         <p:txBody>
-          <a:bodyPr wrap="square" rtlCol="0">
+          <a:bodyPr wrap="none" rtlCol="0">
             <a:noAutofit/>
           </a:bodyPr>
           <a:p>
             <a:r>
-              <a:rPr lang="en-US" altLang="zh-CN" sz="1200" b="1">
-                <a:latin typeface="Arial" panose="020B0604020202020204" pitchFamily="34" charset="0"/>
-                <a:cs typeface="Arial" panose="020B0604020202020204" pitchFamily="34" charset="0"/>
+              <a:rPr b="1" sz="1200">
+                <a:latin typeface="Arial"/>
               </a:rPr>
-              <a:t>(</a:t>
-            </a:r>
-            <a:r>
-              <a:rPr lang="en-US" altLang="zh-CN" sz="1200" b="1">
-                <a:latin typeface="Arial" panose="020B0604020202020204" pitchFamily="34" charset="0"/>
-                <a:cs typeface="Arial" panose="020B0604020202020204" pitchFamily="34" charset="0"/>
-              </a:rPr>
-              <a:t>f)</a:t>
+              <a:t>(f)</a:t>
             </a:r>
             <a:endParaRPr lang="en-US" altLang="zh-CN" sz="1200" b="1">
               <a:latin typeface="Arial" panose="020B0604020202020204" pitchFamily="34" charset="0"/>
@@ -4996,234 +4782,31 @@
         <p:nvPr/>
       </p:nvGrpSpPr>
       <p:grpSpPr/>
-      <p:grpSp>
-        <p:nvGrpSpPr>
-          <p:cNvPr id="9" name="组合 8"/>
-          <p:cNvGrpSpPr/>
+      <p:pic>
+        <p:nvPicPr>
+          <p:cNvPr id="2" name="图片 1" descr="15_rc_device_optimization"/>
+          <p:cNvPicPr>
+            <a:picLocks noChangeAspect="1"/>
+          </p:cNvPicPr>
           <p:nvPr/>
-        </p:nvGrpSpPr>
-        <p:grpSpPr>
-          <a:xfrm>
-            <a:off x="0" y="625475"/>
-            <a:ext cx="9144000" cy="6078220"/>
-            <a:chOff x="0" y="985"/>
-            <a:chExt cx="14400" cy="9572"/>
-          </a:xfrm>
-        </p:grpSpPr>
-        <p:pic>
-          <p:nvPicPr>
-            <p:cNvPr id="4" name="图片 3"/>
-            <p:cNvPicPr>
-              <a:picLocks noChangeAspect="1"/>
-            </p:cNvPicPr>
-            <p:nvPr/>
-          </p:nvPicPr>
-          <p:blipFill>
-            <a:blip r:embed="rId1"/>
-            <a:srcRect t="7194"/>
-            <a:stretch>
-              <a:fillRect/>
-            </a:stretch>
-          </p:blipFill>
-          <p:spPr>
-            <a:xfrm>
-              <a:off x="0" y="985"/>
-              <a:ext cx="14400" cy="9572"/>
-            </a:xfrm>
-            <a:prstGeom prst="rect">
-              <a:avLst/>
-            </a:prstGeom>
-          </p:spPr>
-        </p:pic>
-        <p:sp>
-          <p:nvSpPr>
-            <p:cNvPr id="5" name="矩形 4"/>
-            <p:cNvSpPr/>
-            <p:nvPr/>
-          </p:nvSpPr>
-          <p:spPr>
-            <a:xfrm>
-              <a:off x="1557" y="1049"/>
-              <a:ext cx="232" cy="224"/>
-            </a:xfrm>
-            <a:prstGeom prst="rect">
-              <a:avLst/>
-            </a:prstGeom>
-            <a:solidFill>
-              <a:schemeClr val="bg1"/>
-            </a:solidFill>
-            <a:ln>
-              <a:solidFill>
-                <a:schemeClr val="bg1"/>
-              </a:solidFill>
-            </a:ln>
-          </p:spPr>
-          <p:style>
-            <a:lnRef idx="2">
-              <a:schemeClr val="accent1">
-                <a:lumMod val="75000"/>
-              </a:schemeClr>
-            </a:lnRef>
-            <a:fillRef idx="1">
-              <a:schemeClr val="accent1"/>
-            </a:fillRef>
-            <a:effectRef idx="0">
-              <a:srgbClr val="FFFFFF"/>
-            </a:effectRef>
-            <a:fontRef idx="minor">
-              <a:schemeClr val="lt1"/>
-            </a:fontRef>
-          </p:style>
-          <p:txBody>
-            <a:bodyPr rtlCol="0" anchor="ctr"/>
-            <a:p>
-              <a:pPr algn="ctr"/>
-              <a:endParaRPr lang="zh-CN" altLang="en-US"/>
-            </a:p>
-          </p:txBody>
-        </p:sp>
-        <p:sp>
-          <p:nvSpPr>
-            <p:cNvPr id="6" name="矩形 5"/>
-            <p:cNvSpPr/>
-            <p:nvPr/>
-          </p:nvSpPr>
-          <p:spPr>
-            <a:xfrm>
-              <a:off x="9424" y="1049"/>
-              <a:ext cx="232" cy="224"/>
-            </a:xfrm>
-            <a:prstGeom prst="rect">
-              <a:avLst/>
-            </a:prstGeom>
-            <a:solidFill>
-              <a:schemeClr val="bg1"/>
-            </a:solidFill>
-            <a:ln>
-              <a:solidFill>
-                <a:schemeClr val="bg1"/>
-              </a:solidFill>
-            </a:ln>
-          </p:spPr>
-          <p:style>
-            <a:lnRef idx="2">
-              <a:schemeClr val="accent1">
-                <a:lumMod val="75000"/>
-              </a:schemeClr>
-            </a:lnRef>
-            <a:fillRef idx="1">
-              <a:schemeClr val="accent1"/>
-            </a:fillRef>
-            <a:effectRef idx="0">
-              <a:srgbClr val="FFFFFF"/>
-            </a:effectRef>
-            <a:fontRef idx="minor">
-              <a:schemeClr val="lt1"/>
-            </a:fontRef>
-          </p:style>
-          <p:txBody>
-            <a:bodyPr rtlCol="0" anchor="ctr"/>
-            <a:p>
-              <a:pPr algn="ctr"/>
-              <a:endParaRPr lang="zh-CN" altLang="en-US"/>
-            </a:p>
-          </p:txBody>
-        </p:sp>
-        <p:sp>
-          <p:nvSpPr>
-            <p:cNvPr id="7" name="矩形 6"/>
-            <p:cNvSpPr/>
-            <p:nvPr/>
-          </p:nvSpPr>
-          <p:spPr>
-            <a:xfrm>
-              <a:off x="8289" y="5810"/>
-              <a:ext cx="232" cy="224"/>
-            </a:xfrm>
-            <a:prstGeom prst="rect">
-              <a:avLst/>
-            </a:prstGeom>
-            <a:solidFill>
-              <a:schemeClr val="bg1"/>
-            </a:solidFill>
-            <a:ln>
-              <a:solidFill>
-                <a:schemeClr val="bg1"/>
-              </a:solidFill>
-            </a:ln>
-          </p:spPr>
-          <p:style>
-            <a:lnRef idx="2">
-              <a:schemeClr val="accent1">
-                <a:lumMod val="75000"/>
-              </a:schemeClr>
-            </a:lnRef>
-            <a:fillRef idx="1">
-              <a:schemeClr val="accent1"/>
-            </a:fillRef>
-            <a:effectRef idx="0">
-              <a:srgbClr val="FFFFFF"/>
-            </a:effectRef>
-            <a:fontRef idx="minor">
-              <a:schemeClr val="lt1"/>
-            </a:fontRef>
-          </p:style>
-          <p:txBody>
-            <a:bodyPr rtlCol="0" anchor="ctr"/>
-            <a:p>
-              <a:pPr algn="ctr"/>
-              <a:endParaRPr lang="zh-CN" altLang="en-US"/>
-            </a:p>
-          </p:txBody>
-        </p:sp>
-        <p:sp>
-          <p:nvSpPr>
-            <p:cNvPr id="8" name="矩形 7"/>
-            <p:cNvSpPr/>
-            <p:nvPr/>
-          </p:nvSpPr>
-          <p:spPr>
-            <a:xfrm>
-              <a:off x="1539" y="5810"/>
-              <a:ext cx="232" cy="224"/>
-            </a:xfrm>
-            <a:prstGeom prst="rect">
-              <a:avLst/>
-            </a:prstGeom>
-            <a:solidFill>
-              <a:schemeClr val="bg1"/>
-            </a:solidFill>
-            <a:ln>
-              <a:solidFill>
-                <a:schemeClr val="bg1"/>
-              </a:solidFill>
-            </a:ln>
-          </p:spPr>
-          <p:style>
-            <a:lnRef idx="2">
-              <a:schemeClr val="accent1">
-                <a:lumMod val="75000"/>
-              </a:schemeClr>
-            </a:lnRef>
-            <a:fillRef idx="1">
-              <a:schemeClr val="accent1"/>
-            </a:fillRef>
-            <a:effectRef idx="0">
-              <a:srgbClr val="FFFFFF"/>
-            </a:effectRef>
-            <a:fontRef idx="minor">
-              <a:schemeClr val="lt1"/>
-            </a:fontRef>
-          </p:style>
-          <p:txBody>
-            <a:bodyPr rtlCol="0" anchor="ctr"/>
-            <a:p>
-              <a:pPr algn="ctr"/>
-              <a:endParaRPr lang="zh-CN" altLang="en-US"/>
-            </a:p>
-          </p:txBody>
-        </p:sp>
-      </p:grpSp>
+        </p:nvPicPr>
+        <p:blipFill>
+          <a:blip r:embed="rId1"/>
+          <a:srcRect t="5517"/>
+          <a:stretch>
+            <a:fillRect/>
+          </a:stretch>
+        </p:blipFill>
+        <p:spPr>
+          <a:xfrm>
+            <a:off x="0" y="515620"/>
+            <a:ext cx="9144000" cy="6188075"/>
+          </a:xfrm>
+          <a:prstGeom prst="rect">
+            <a:avLst/>
+          </a:prstGeom>
+        </p:spPr>
+      </p:pic>
       <p:sp>
         <p:nvSpPr>
           <p:cNvPr id="17" name="文本框 16"/>
@@ -5241,14 +4824,13 @@
           <a:noFill/>
         </p:spPr>
         <p:txBody>
-          <a:bodyPr wrap="square" rtlCol="0">
+          <a:bodyPr wrap="none" rtlCol="0">
             <a:noAutofit/>
           </a:bodyPr>
           <a:p>
             <a:r>
-              <a:rPr lang="en-US" altLang="zh-CN" sz="1600" b="1">
-                <a:latin typeface="Arial" panose="020B0604020202020204" pitchFamily="34" charset="0"/>
-                <a:cs typeface="Arial" panose="020B0604020202020204" pitchFamily="34" charset="0"/>
+              <a:rPr b="1" sz="1600">
+                <a:latin typeface="Arial"/>
               </a:rPr>
               <a:t>(a)</a:t>
             </a:r>
@@ -5276,14 +4858,13 @@
           <a:noFill/>
         </p:spPr>
         <p:txBody>
-          <a:bodyPr wrap="square" rtlCol="0">
+          <a:bodyPr wrap="none" rtlCol="0">
             <a:noAutofit/>
           </a:bodyPr>
           <a:p>
             <a:r>
-              <a:rPr lang="en-US" altLang="zh-CN" sz="1600" b="1">
-                <a:latin typeface="Arial" panose="020B0604020202020204" pitchFamily="34" charset="0"/>
-                <a:cs typeface="Arial" panose="020B0604020202020204" pitchFamily="34" charset="0"/>
+              <a:rPr b="1" sz="1600">
+                <a:latin typeface="Arial"/>
               </a:rPr>
               <a:t>(b)</a:t>
             </a:r>
@@ -5311,14 +4892,13 @@
           <a:noFill/>
         </p:spPr>
         <p:txBody>
-          <a:bodyPr wrap="square" rtlCol="0">
+          <a:bodyPr wrap="none" rtlCol="0">
             <a:noAutofit/>
           </a:bodyPr>
           <a:p>
             <a:r>
-              <a:rPr lang="en-US" altLang="zh-CN" sz="1600" b="1">
-                <a:latin typeface="Arial" panose="020B0604020202020204" pitchFamily="34" charset="0"/>
-                <a:cs typeface="Arial" panose="020B0604020202020204" pitchFamily="34" charset="0"/>
+              <a:rPr b="1" sz="1600">
+                <a:latin typeface="Arial"/>
               </a:rPr>
               <a:t>(c)</a:t>
             </a:r>
@@ -5346,14 +4926,13 @@
           <a:noFill/>
         </p:spPr>
         <p:txBody>
-          <a:bodyPr wrap="square" rtlCol="0">
+          <a:bodyPr wrap="none" rtlCol="0">
             <a:noAutofit/>
           </a:bodyPr>
           <a:p>
             <a:r>
-              <a:rPr lang="en-US" altLang="zh-CN" sz="1600" b="1">
-                <a:latin typeface="Arial" panose="020B0604020202020204" pitchFamily="34" charset="0"/>
-                <a:cs typeface="Arial" panose="020B0604020202020204" pitchFamily="34" charset="0"/>
+              <a:rPr b="1" sz="1600">
+                <a:latin typeface="Arial"/>
               </a:rPr>
               <a:t>(d)</a:t>
             </a:r>
@@ -5627,14 +5206,13 @@
           <a:noFill/>
         </p:spPr>
         <p:txBody>
-          <a:bodyPr wrap="square" rtlCol="0">
+          <a:bodyPr wrap="none" rtlCol="0">
             <a:noAutofit/>
           </a:bodyPr>
           <a:p>
             <a:r>
-              <a:rPr lang="en-US" altLang="zh-CN" sz="1600" b="1">
-                <a:latin typeface="Arial" panose="020B0604020202020204" pitchFamily="34" charset="0"/>
-                <a:cs typeface="Arial" panose="020B0604020202020204" pitchFamily="34" charset="0"/>
+              <a:rPr b="1" sz="1600">
+                <a:latin typeface="Arial"/>
               </a:rPr>
               <a:t>(a)</a:t>
             </a:r>
@@ -5662,14 +5240,13 @@
           <a:noFill/>
         </p:spPr>
         <p:txBody>
-          <a:bodyPr wrap="square" rtlCol="0">
+          <a:bodyPr wrap="none" rtlCol="0">
             <a:noAutofit/>
           </a:bodyPr>
           <a:p>
             <a:r>
-              <a:rPr lang="en-US" altLang="zh-CN" sz="1600" b="1">
-                <a:latin typeface="Arial" panose="020B0604020202020204" pitchFamily="34" charset="0"/>
-                <a:cs typeface="Arial" panose="020B0604020202020204" pitchFamily="34" charset="0"/>
+              <a:rPr b="1" sz="1600">
+                <a:latin typeface="Arial"/>
               </a:rPr>
               <a:t>(b)</a:t>
             </a:r>
@@ -5697,14 +5274,13 @@
           <a:noFill/>
         </p:spPr>
         <p:txBody>
-          <a:bodyPr wrap="square" rtlCol="0">
+          <a:bodyPr wrap="none" rtlCol="0">
             <a:noAutofit/>
           </a:bodyPr>
           <a:p>
             <a:r>
-              <a:rPr lang="en-US" altLang="zh-CN" sz="1600" b="1">
-                <a:latin typeface="Arial" panose="020B0604020202020204" pitchFamily="34" charset="0"/>
-                <a:cs typeface="Arial" panose="020B0604020202020204" pitchFamily="34" charset="0"/>
+              <a:rPr b="1" sz="1600">
+                <a:latin typeface="Arial"/>
               </a:rPr>
               <a:t>(c)</a:t>
             </a:r>
@@ -5732,14 +5308,13 @@
           <a:noFill/>
         </p:spPr>
         <p:txBody>
-          <a:bodyPr wrap="square" rtlCol="0">
+          <a:bodyPr wrap="none" rtlCol="0">
             <a:noAutofit/>
           </a:bodyPr>
           <a:p>
             <a:r>
-              <a:rPr lang="en-US" altLang="zh-CN" sz="1600" b="1">
-                <a:latin typeface="Arial" panose="020B0604020202020204" pitchFamily="34" charset="0"/>
-                <a:cs typeface="Arial" panose="020B0604020202020204" pitchFamily="34" charset="0"/>
+              <a:rPr b="1" sz="1600">
+                <a:latin typeface="Arial"/>
               </a:rPr>
               <a:t>(d)</a:t>
             </a:r>
@@ -5768,234 +5343,31 @@
         <p:nvPr/>
       </p:nvGrpSpPr>
       <p:grpSpPr/>
-      <p:grpSp>
-        <p:nvGrpSpPr>
-          <p:cNvPr id="9" name="组合 8"/>
-          <p:cNvGrpSpPr/>
+      <p:pic>
+        <p:nvPicPr>
+          <p:cNvPr id="2" name="图片 1" descr="17_rc_robustness"/>
+          <p:cNvPicPr>
+            <a:picLocks noChangeAspect="1"/>
+          </p:cNvPicPr>
           <p:nvPr/>
-        </p:nvGrpSpPr>
-        <p:grpSpPr>
-          <a:xfrm>
-            <a:off x="0" y="654685"/>
-            <a:ext cx="9144000" cy="6040120"/>
-            <a:chOff x="0" y="1031"/>
-            <a:chExt cx="14400" cy="9512"/>
-          </a:xfrm>
-        </p:grpSpPr>
-        <p:pic>
-          <p:nvPicPr>
-            <p:cNvPr id="4" name="图片 3"/>
-            <p:cNvPicPr>
-              <a:picLocks noChangeAspect="1"/>
-            </p:cNvPicPr>
-            <p:nvPr/>
-          </p:nvPicPr>
-          <p:blipFill>
-            <a:blip r:embed="rId1"/>
-            <a:srcRect t="7542"/>
-            <a:stretch>
-              <a:fillRect/>
-            </a:stretch>
-          </p:blipFill>
-          <p:spPr>
-            <a:xfrm>
-              <a:off x="0" y="1031"/>
-              <a:ext cx="14400" cy="9513"/>
-            </a:xfrm>
-            <a:prstGeom prst="rect">
-              <a:avLst/>
-            </a:prstGeom>
-          </p:spPr>
-        </p:pic>
-        <p:sp>
-          <p:nvSpPr>
-            <p:cNvPr id="5" name="矩形 4"/>
-            <p:cNvSpPr/>
-            <p:nvPr/>
-          </p:nvSpPr>
-          <p:spPr>
-            <a:xfrm>
-              <a:off x="1544" y="1049"/>
-              <a:ext cx="232" cy="224"/>
-            </a:xfrm>
-            <a:prstGeom prst="rect">
-              <a:avLst/>
-            </a:prstGeom>
-            <a:solidFill>
-              <a:schemeClr val="bg1"/>
-            </a:solidFill>
-            <a:ln>
-              <a:solidFill>
-                <a:schemeClr val="bg1"/>
-              </a:solidFill>
-            </a:ln>
-          </p:spPr>
-          <p:style>
-            <a:lnRef idx="2">
-              <a:schemeClr val="accent1">
-                <a:lumMod val="75000"/>
-              </a:schemeClr>
-            </a:lnRef>
-            <a:fillRef idx="1">
-              <a:schemeClr val="accent1"/>
-            </a:fillRef>
-            <a:effectRef idx="0">
-              <a:srgbClr val="FFFFFF"/>
-            </a:effectRef>
-            <a:fontRef idx="minor">
-              <a:schemeClr val="lt1"/>
-            </a:fontRef>
-          </p:style>
-          <p:txBody>
-            <a:bodyPr rtlCol="0" anchor="ctr"/>
-            <a:p>
-              <a:pPr algn="ctr"/>
-              <a:endParaRPr lang="zh-CN" altLang="en-US"/>
-            </a:p>
-          </p:txBody>
-        </p:sp>
-        <p:sp>
-          <p:nvSpPr>
-            <p:cNvPr id="6" name="矩形 5"/>
-            <p:cNvSpPr/>
-            <p:nvPr/>
-          </p:nvSpPr>
-          <p:spPr>
-            <a:xfrm>
-              <a:off x="8960" y="1049"/>
-              <a:ext cx="232" cy="224"/>
-            </a:xfrm>
-            <a:prstGeom prst="rect">
-              <a:avLst/>
-            </a:prstGeom>
-            <a:solidFill>
-              <a:schemeClr val="bg1"/>
-            </a:solidFill>
-            <a:ln>
-              <a:solidFill>
-                <a:schemeClr val="bg1"/>
-              </a:solidFill>
-            </a:ln>
-          </p:spPr>
-          <p:style>
-            <a:lnRef idx="2">
-              <a:schemeClr val="accent1">
-                <a:lumMod val="75000"/>
-              </a:schemeClr>
-            </a:lnRef>
-            <a:fillRef idx="1">
-              <a:schemeClr val="accent1"/>
-            </a:fillRef>
-            <a:effectRef idx="0">
-              <a:srgbClr val="FFFFFF"/>
-            </a:effectRef>
-            <a:fontRef idx="minor">
-              <a:schemeClr val="lt1"/>
-            </a:fontRef>
-          </p:style>
-          <p:txBody>
-            <a:bodyPr rtlCol="0" anchor="ctr"/>
-            <a:p>
-              <a:pPr algn="ctr"/>
-              <a:endParaRPr lang="zh-CN" altLang="en-US"/>
-            </a:p>
-          </p:txBody>
-        </p:sp>
-        <p:sp>
-          <p:nvSpPr>
-            <p:cNvPr id="7" name="矩形 6"/>
-            <p:cNvSpPr/>
-            <p:nvPr/>
-          </p:nvSpPr>
-          <p:spPr>
-            <a:xfrm>
-              <a:off x="1835" y="5820"/>
-              <a:ext cx="232" cy="224"/>
-            </a:xfrm>
-            <a:prstGeom prst="rect">
-              <a:avLst/>
-            </a:prstGeom>
-            <a:solidFill>
-              <a:schemeClr val="bg1"/>
-            </a:solidFill>
-            <a:ln>
-              <a:solidFill>
-                <a:schemeClr val="bg1"/>
-              </a:solidFill>
-            </a:ln>
-          </p:spPr>
-          <p:style>
-            <a:lnRef idx="2">
-              <a:schemeClr val="accent1">
-                <a:lumMod val="75000"/>
-              </a:schemeClr>
-            </a:lnRef>
-            <a:fillRef idx="1">
-              <a:schemeClr val="accent1"/>
-            </a:fillRef>
-            <a:effectRef idx="0">
-              <a:srgbClr val="FFFFFF"/>
-            </a:effectRef>
-            <a:fontRef idx="minor">
-              <a:schemeClr val="lt1"/>
-            </a:fontRef>
-          </p:style>
-          <p:txBody>
-            <a:bodyPr rtlCol="0" anchor="ctr"/>
-            <a:p>
-              <a:pPr algn="ctr"/>
-              <a:endParaRPr lang="zh-CN" altLang="en-US"/>
-            </a:p>
-          </p:txBody>
-        </p:sp>
-        <p:sp>
-          <p:nvSpPr>
-            <p:cNvPr id="8" name="矩形 7"/>
-            <p:cNvSpPr/>
-            <p:nvPr/>
-          </p:nvSpPr>
-          <p:spPr>
-            <a:xfrm>
-              <a:off x="9516" y="5820"/>
-              <a:ext cx="232" cy="224"/>
-            </a:xfrm>
-            <a:prstGeom prst="rect">
-              <a:avLst/>
-            </a:prstGeom>
-            <a:solidFill>
-              <a:schemeClr val="bg1"/>
-            </a:solidFill>
-            <a:ln>
-              <a:solidFill>
-                <a:schemeClr val="bg1"/>
-              </a:solidFill>
-            </a:ln>
-          </p:spPr>
-          <p:style>
-            <a:lnRef idx="2">
-              <a:schemeClr val="accent1">
-                <a:lumMod val="75000"/>
-              </a:schemeClr>
-            </a:lnRef>
-            <a:fillRef idx="1">
-              <a:schemeClr val="accent1"/>
-            </a:fillRef>
-            <a:effectRef idx="0">
-              <a:srgbClr val="FFFFFF"/>
-            </a:effectRef>
-            <a:fontRef idx="minor">
-              <a:schemeClr val="lt1"/>
-            </a:fontRef>
-          </p:style>
-          <p:txBody>
-            <a:bodyPr rtlCol="0" anchor="ctr"/>
-            <a:p>
-              <a:pPr algn="ctr"/>
-              <a:endParaRPr lang="zh-CN" altLang="en-US"/>
-            </a:p>
-          </p:txBody>
-        </p:sp>
-      </p:grpSp>
+        </p:nvPicPr>
+        <p:blipFill>
+          <a:blip r:embed="rId1"/>
+          <a:srcRect t="7328"/>
+          <a:stretch>
+            <a:fillRect/>
+          </a:stretch>
+        </p:blipFill>
+        <p:spPr>
+          <a:xfrm>
+            <a:off x="0" y="640715"/>
+            <a:ext cx="9144000" cy="6054725"/>
+          </a:xfrm>
+          <a:prstGeom prst="rect">
+            <a:avLst/>
+          </a:prstGeom>
+        </p:spPr>
+      </p:pic>
       <p:sp>
         <p:nvSpPr>
           <p:cNvPr id="17" name="文本框 16"/>
@@ -6013,14 +5385,13 @@
           <a:noFill/>
         </p:spPr>
         <p:txBody>
-          <a:bodyPr wrap="square" rtlCol="0">
+          <a:bodyPr wrap="none" rtlCol="0">
             <a:noAutofit/>
           </a:bodyPr>
           <a:p>
             <a:r>
-              <a:rPr lang="en-US" altLang="zh-CN" sz="1600" b="1">
-                <a:latin typeface="Arial" panose="020B0604020202020204" pitchFamily="34" charset="0"/>
-                <a:cs typeface="Arial" panose="020B0604020202020204" pitchFamily="34" charset="0"/>
+              <a:rPr b="1" sz="1600">
+                <a:latin typeface="Arial"/>
               </a:rPr>
               <a:t>(a)</a:t>
             </a:r>
@@ -6048,14 +5419,13 @@
           <a:noFill/>
         </p:spPr>
         <p:txBody>
-          <a:bodyPr wrap="square" rtlCol="0">
+          <a:bodyPr wrap="none" rtlCol="0">
             <a:noAutofit/>
           </a:bodyPr>
           <a:p>
             <a:r>
-              <a:rPr lang="en-US" altLang="zh-CN" sz="1600" b="1">
-                <a:latin typeface="Arial" panose="020B0604020202020204" pitchFamily="34" charset="0"/>
-                <a:cs typeface="Arial" panose="020B0604020202020204" pitchFamily="34" charset="0"/>
+              <a:rPr b="1" sz="1600">
+                <a:latin typeface="Arial"/>
               </a:rPr>
               <a:t>(b)</a:t>
             </a:r>
@@ -6083,14 +5453,13 @@
           <a:noFill/>
         </p:spPr>
         <p:txBody>
-          <a:bodyPr wrap="square" rtlCol="0">
+          <a:bodyPr wrap="none" rtlCol="0">
             <a:noAutofit/>
           </a:bodyPr>
           <a:p>
             <a:r>
-              <a:rPr lang="en-US" altLang="zh-CN" sz="1600" b="1">
-                <a:latin typeface="Arial" panose="020B0604020202020204" pitchFamily="34" charset="0"/>
-                <a:cs typeface="Arial" panose="020B0604020202020204" pitchFamily="34" charset="0"/>
+              <a:rPr b="1" sz="1600">
+                <a:latin typeface="Arial"/>
               </a:rPr>
               <a:t>(c)</a:t>
             </a:r>
@@ -6118,14 +5487,13 @@
           <a:noFill/>
         </p:spPr>
         <p:txBody>
-          <a:bodyPr wrap="square" rtlCol="0">
+          <a:bodyPr wrap="none" rtlCol="0">
             <a:noAutofit/>
           </a:bodyPr>
           <a:p>
             <a:r>
-              <a:rPr lang="en-US" altLang="zh-CN" sz="1600" b="1">
-                <a:latin typeface="Arial" panose="020B0604020202020204" pitchFamily="34" charset="0"/>
-                <a:cs typeface="Arial" panose="020B0604020202020204" pitchFamily="34" charset="0"/>
+              <a:rPr b="1" sz="1600">
+                <a:latin typeface="Arial"/>
               </a:rPr>
               <a:t>(d)</a:t>
             </a:r>
@@ -6162,10 +5530,10 @@
         </p:nvGrpSpPr>
         <p:grpSpPr>
           <a:xfrm>
-            <a:off x="0" y="467995"/>
-            <a:ext cx="9144000" cy="6051550"/>
+            <a:off x="0" y="191770"/>
+            <a:ext cx="9144000" cy="6525895"/>
             <a:chOff x="0" y="1007"/>
-            <a:chExt cx="14400" cy="9530"/>
+            <a:chExt cx="14400" cy="10277"/>
           </a:xfrm>
         </p:grpSpPr>
         <p:pic>
@@ -6193,100 +5561,6 @@
             </a:prstGeom>
           </p:spPr>
         </p:pic>
-        <p:sp>
-          <p:nvSpPr>
-            <p:cNvPr id="5" name="矩形 4"/>
-            <p:cNvSpPr/>
-            <p:nvPr/>
-          </p:nvSpPr>
-          <p:spPr>
-            <a:xfrm>
-              <a:off x="2156" y="1010"/>
-              <a:ext cx="232" cy="224"/>
-            </a:xfrm>
-            <a:prstGeom prst="rect">
-              <a:avLst/>
-            </a:prstGeom>
-            <a:solidFill>
-              <a:schemeClr val="bg1"/>
-            </a:solidFill>
-            <a:ln>
-              <a:solidFill>
-                <a:schemeClr val="bg1"/>
-              </a:solidFill>
-            </a:ln>
-          </p:spPr>
-          <p:style>
-            <a:lnRef idx="2">
-              <a:schemeClr val="accent1">
-                <a:lumMod val="75000"/>
-              </a:schemeClr>
-            </a:lnRef>
-            <a:fillRef idx="1">
-              <a:schemeClr val="accent1"/>
-            </a:fillRef>
-            <a:effectRef idx="0">
-              <a:srgbClr val="FFFFFF"/>
-            </a:effectRef>
-            <a:fontRef idx="minor">
-              <a:schemeClr val="lt1"/>
-            </a:fontRef>
-          </p:style>
-          <p:txBody>
-            <a:bodyPr rtlCol="0" anchor="ctr"/>
-            <a:p>
-              <a:pPr algn="ctr"/>
-              <a:endParaRPr lang="zh-CN" altLang="en-US"/>
-            </a:p>
-          </p:txBody>
-        </p:sp>
-        <p:sp>
-          <p:nvSpPr>
-            <p:cNvPr id="6" name="矩形 5"/>
-            <p:cNvSpPr/>
-            <p:nvPr/>
-          </p:nvSpPr>
-          <p:spPr>
-            <a:xfrm>
-              <a:off x="9912" y="1010"/>
-              <a:ext cx="232" cy="224"/>
-            </a:xfrm>
-            <a:prstGeom prst="rect">
-              <a:avLst/>
-            </a:prstGeom>
-            <a:solidFill>
-              <a:schemeClr val="bg1"/>
-            </a:solidFill>
-            <a:ln>
-              <a:solidFill>
-                <a:schemeClr val="bg1"/>
-              </a:solidFill>
-            </a:ln>
-          </p:spPr>
-          <p:style>
-            <a:lnRef idx="2">
-              <a:schemeClr val="accent1">
-                <a:lumMod val="75000"/>
-              </a:schemeClr>
-            </a:lnRef>
-            <a:fillRef idx="1">
-              <a:schemeClr val="accent1"/>
-            </a:fillRef>
-            <a:effectRef idx="0">
-              <a:srgbClr val="FFFFFF"/>
-            </a:effectRef>
-            <a:fontRef idx="minor">
-              <a:schemeClr val="lt1"/>
-            </a:fontRef>
-          </p:style>
-          <p:txBody>
-            <a:bodyPr rtlCol="0" anchor="ctr"/>
-            <a:p>
-              <a:pPr algn="ctr"/>
-              <a:endParaRPr lang="zh-CN" altLang="en-US"/>
-            </a:p>
-          </p:txBody>
-        </p:sp>
         <p:sp>
           <p:nvSpPr>
             <p:cNvPr id="7" name="矩形 6"/>
@@ -6390,7 +5664,7 @@
         </p:nvSpPr>
         <p:spPr>
           <a:xfrm>
-            <a:off x="-9684" y="326866"/>
+            <a:off x="-9684" y="79216"/>
             <a:ext cx="466249" cy="328613"/>
           </a:xfrm>
           <a:prstGeom prst="rect">
@@ -6399,14 +5673,13 @@
           <a:noFill/>
         </p:spPr>
         <p:txBody>
-          <a:bodyPr wrap="square" rtlCol="0">
+          <a:bodyPr wrap="none" rtlCol="0">
             <a:noAutofit/>
           </a:bodyPr>
           <a:p>
             <a:r>
-              <a:rPr lang="en-US" altLang="zh-CN" sz="1600" b="1">
-                <a:latin typeface="Arial" panose="020B0604020202020204" pitchFamily="34" charset="0"/>
-                <a:cs typeface="Arial" panose="020B0604020202020204" pitchFamily="34" charset="0"/>
+              <a:rPr b="1" sz="1600">
+                <a:latin typeface="Arial"/>
               </a:rPr>
               <a:t>(a)</a:t>
             </a:r>
@@ -6425,7 +5698,7 @@
         </p:nvSpPr>
         <p:spPr>
           <a:xfrm>
-            <a:off x="4631055" y="326866"/>
+            <a:off x="4631055" y="79216"/>
             <a:ext cx="466249" cy="328613"/>
           </a:xfrm>
           <a:prstGeom prst="rect">
@@ -6434,14 +5707,13 @@
           <a:noFill/>
         </p:spPr>
         <p:txBody>
-          <a:bodyPr wrap="square" rtlCol="0">
+          <a:bodyPr wrap="none" rtlCol="0">
             <a:noAutofit/>
           </a:bodyPr>
           <a:p>
             <a:r>
-              <a:rPr lang="en-US" altLang="zh-CN" sz="1600" b="1">
-                <a:latin typeface="Arial" panose="020B0604020202020204" pitchFamily="34" charset="0"/>
-                <a:cs typeface="Arial" panose="020B0604020202020204" pitchFamily="34" charset="0"/>
+              <a:rPr b="1" sz="1600">
+                <a:latin typeface="Arial"/>
               </a:rPr>
               <a:t>(b)</a:t>
             </a:r>
@@ -6460,7 +5732,7 @@
         </p:nvSpPr>
         <p:spPr>
           <a:xfrm>
-            <a:off x="-9684" y="3353911"/>
+            <a:off x="-9684" y="3306286"/>
             <a:ext cx="466249" cy="328613"/>
           </a:xfrm>
           <a:prstGeom prst="rect">
@@ -6469,14 +5741,13 @@
           <a:noFill/>
         </p:spPr>
         <p:txBody>
-          <a:bodyPr wrap="square" rtlCol="0">
+          <a:bodyPr wrap="none" rtlCol="0">
             <a:noAutofit/>
           </a:bodyPr>
           <a:p>
             <a:r>
-              <a:rPr lang="en-US" altLang="zh-CN" sz="1600" b="1">
-                <a:latin typeface="Arial" panose="020B0604020202020204" pitchFamily="34" charset="0"/>
-                <a:cs typeface="Arial" panose="020B0604020202020204" pitchFamily="34" charset="0"/>
+              <a:rPr b="1" sz="1600">
+                <a:latin typeface="Arial"/>
               </a:rPr>
               <a:t>(c)</a:t>
             </a:r>
@@ -6495,7 +5766,7 @@
         </p:nvSpPr>
         <p:spPr>
           <a:xfrm>
-            <a:off x="4631055" y="3353911"/>
+            <a:off x="4631055" y="3306286"/>
             <a:ext cx="466249" cy="328613"/>
           </a:xfrm>
           <a:prstGeom prst="rect">
@@ -6504,14 +5775,13 @@
           <a:noFill/>
         </p:spPr>
         <p:txBody>
-          <a:bodyPr wrap="square" rtlCol="0">
+          <a:bodyPr wrap="none" rtlCol="0">
             <a:noAutofit/>
           </a:bodyPr>
           <a:p>
             <a:r>
-              <a:rPr lang="en-US" altLang="zh-CN" sz="1600" b="1">
-                <a:latin typeface="Arial" panose="020B0604020202020204" pitchFamily="34" charset="0"/>
-                <a:cs typeface="Arial" panose="020B0604020202020204" pitchFamily="34" charset="0"/>
+              <a:rPr b="1" sz="1600">
+                <a:latin typeface="Arial"/>
               </a:rPr>
               <a:t>(d)</a:t>
             </a:r>
@@ -6540,234 +5810,31 @@
         <p:nvPr/>
       </p:nvGrpSpPr>
       <p:grpSpPr/>
-      <p:grpSp>
-        <p:nvGrpSpPr>
-          <p:cNvPr id="9" name="组合 8"/>
-          <p:cNvGrpSpPr/>
+      <p:pic>
+        <p:nvPicPr>
+          <p:cNvPr id="2" name="图片 1" descr="16_rc_hardware_ppa"/>
+          <p:cNvPicPr>
+            <a:picLocks noChangeAspect="1"/>
+          </p:cNvPicPr>
           <p:nvPr/>
-        </p:nvGrpSpPr>
-        <p:grpSpPr>
+        </p:nvPicPr>
+        <p:blipFill>
+          <a:blip r:embed="rId1"/>
+          <a:srcRect t="7553"/>
+          <a:stretch>
+            <a:fillRect/>
+          </a:stretch>
+        </p:blipFill>
+        <p:spPr>
           <a:xfrm>
             <a:off x="0" y="659765"/>
             <a:ext cx="9144000" cy="6031230"/>
-            <a:chOff x="0" y="1039"/>
-            <a:chExt cx="14400" cy="9498"/>
-          </a:xfrm>
-        </p:grpSpPr>
-        <p:pic>
-          <p:nvPicPr>
-            <p:cNvPr id="4" name="图片 3"/>
-            <p:cNvPicPr>
-              <a:picLocks noChangeAspect="1"/>
-            </p:cNvPicPr>
-            <p:nvPr/>
-          </p:nvPicPr>
-          <p:blipFill>
-            <a:blip r:embed="rId1"/>
-            <a:srcRect t="7553"/>
-            <a:stretch>
-              <a:fillRect/>
-            </a:stretch>
-          </p:blipFill>
-          <p:spPr>
-            <a:xfrm>
-              <a:off x="0" y="1039"/>
-              <a:ext cx="14400" cy="9498"/>
-            </a:xfrm>
-            <a:prstGeom prst="rect">
-              <a:avLst/>
-            </a:prstGeom>
-          </p:spPr>
-        </p:pic>
-        <p:sp>
-          <p:nvSpPr>
-            <p:cNvPr id="5" name="矩形 4"/>
-            <p:cNvSpPr/>
-            <p:nvPr/>
-          </p:nvSpPr>
-          <p:spPr>
-            <a:xfrm>
-              <a:off x="1732" y="1039"/>
-              <a:ext cx="232" cy="224"/>
-            </a:xfrm>
-            <a:prstGeom prst="rect">
-              <a:avLst/>
-            </a:prstGeom>
-            <a:solidFill>
-              <a:schemeClr val="bg1"/>
-            </a:solidFill>
-            <a:ln>
-              <a:solidFill>
-                <a:schemeClr val="bg1"/>
-              </a:solidFill>
-            </a:ln>
-          </p:spPr>
-          <p:style>
-            <a:lnRef idx="2">
-              <a:schemeClr val="accent1">
-                <a:lumMod val="75000"/>
-              </a:schemeClr>
-            </a:lnRef>
-            <a:fillRef idx="1">
-              <a:schemeClr val="accent1"/>
-            </a:fillRef>
-            <a:effectRef idx="0">
-              <a:srgbClr val="FFFFFF"/>
-            </a:effectRef>
-            <a:fontRef idx="minor">
-              <a:schemeClr val="lt1"/>
-            </a:fontRef>
-          </p:style>
-          <p:txBody>
-            <a:bodyPr rtlCol="0" anchor="ctr"/>
-            <a:p>
-              <a:pPr algn="ctr"/>
-              <a:endParaRPr lang="zh-CN" altLang="en-US"/>
-            </a:p>
-          </p:txBody>
-        </p:sp>
-        <p:sp>
-          <p:nvSpPr>
-            <p:cNvPr id="6" name="矩形 5"/>
-            <p:cNvSpPr/>
-            <p:nvPr/>
-          </p:nvSpPr>
-          <p:spPr>
-            <a:xfrm>
-              <a:off x="9064" y="1039"/>
-              <a:ext cx="232" cy="224"/>
-            </a:xfrm>
-            <a:prstGeom prst="rect">
-              <a:avLst/>
-            </a:prstGeom>
-            <a:solidFill>
-              <a:schemeClr val="bg1"/>
-            </a:solidFill>
-            <a:ln>
-              <a:solidFill>
-                <a:schemeClr val="bg1"/>
-              </a:solidFill>
-            </a:ln>
-          </p:spPr>
-          <p:style>
-            <a:lnRef idx="2">
-              <a:schemeClr val="accent1">
-                <a:lumMod val="75000"/>
-              </a:schemeClr>
-            </a:lnRef>
-            <a:fillRef idx="1">
-              <a:schemeClr val="accent1"/>
-            </a:fillRef>
-            <a:effectRef idx="0">
-              <a:srgbClr val="FFFFFF"/>
-            </a:effectRef>
-            <a:fontRef idx="minor">
-              <a:schemeClr val="lt1"/>
-            </a:fontRef>
-          </p:style>
-          <p:txBody>
-            <a:bodyPr rtlCol="0" anchor="ctr"/>
-            <a:p>
-              <a:pPr algn="ctr"/>
-              <a:endParaRPr lang="zh-CN" altLang="en-US"/>
-            </a:p>
-          </p:txBody>
-        </p:sp>
-        <p:sp>
-          <p:nvSpPr>
-            <p:cNvPr id="7" name="矩形 6"/>
-            <p:cNvSpPr/>
-            <p:nvPr/>
-          </p:nvSpPr>
-          <p:spPr>
-            <a:xfrm>
-              <a:off x="1607" y="5736"/>
-              <a:ext cx="232" cy="224"/>
-            </a:xfrm>
-            <a:prstGeom prst="rect">
-              <a:avLst/>
-            </a:prstGeom>
-            <a:solidFill>
-              <a:schemeClr val="bg1"/>
-            </a:solidFill>
-            <a:ln>
-              <a:solidFill>
-                <a:schemeClr val="bg1"/>
-              </a:solidFill>
-            </a:ln>
-          </p:spPr>
-          <p:style>
-            <a:lnRef idx="2">
-              <a:schemeClr val="accent1">
-                <a:lumMod val="75000"/>
-              </a:schemeClr>
-            </a:lnRef>
-            <a:fillRef idx="1">
-              <a:schemeClr val="accent1"/>
-            </a:fillRef>
-            <a:effectRef idx="0">
-              <a:srgbClr val="FFFFFF"/>
-            </a:effectRef>
-            <a:fontRef idx="minor">
-              <a:schemeClr val="lt1"/>
-            </a:fontRef>
-          </p:style>
-          <p:txBody>
-            <a:bodyPr rtlCol="0" anchor="ctr"/>
-            <a:p>
-              <a:pPr algn="ctr"/>
-              <a:endParaRPr lang="zh-CN" altLang="en-US"/>
-            </a:p>
-          </p:txBody>
-        </p:sp>
-        <p:sp>
-          <p:nvSpPr>
-            <p:cNvPr id="8" name="矩形 7"/>
-            <p:cNvSpPr/>
-            <p:nvPr/>
-          </p:nvSpPr>
-          <p:spPr>
-            <a:xfrm>
-              <a:off x="8832" y="5736"/>
-              <a:ext cx="232" cy="224"/>
-            </a:xfrm>
-            <a:prstGeom prst="rect">
-              <a:avLst/>
-            </a:prstGeom>
-            <a:solidFill>
-              <a:schemeClr val="bg1"/>
-            </a:solidFill>
-            <a:ln>
-              <a:solidFill>
-                <a:schemeClr val="bg1"/>
-              </a:solidFill>
-            </a:ln>
-          </p:spPr>
-          <p:style>
-            <a:lnRef idx="2">
-              <a:schemeClr val="accent1">
-                <a:lumMod val="75000"/>
-              </a:schemeClr>
-            </a:lnRef>
-            <a:fillRef idx="1">
-              <a:schemeClr val="accent1"/>
-            </a:fillRef>
-            <a:effectRef idx="0">
-              <a:srgbClr val="FFFFFF"/>
-            </a:effectRef>
-            <a:fontRef idx="minor">
-              <a:schemeClr val="lt1"/>
-            </a:fontRef>
-          </p:style>
-          <p:txBody>
-            <a:bodyPr rtlCol="0" anchor="ctr"/>
-            <a:p>
-              <a:pPr algn="ctr"/>
-              <a:endParaRPr lang="zh-CN" altLang="en-US"/>
-            </a:p>
-          </p:txBody>
-        </p:sp>
-      </p:grpSp>
+          </a:xfrm>
+          <a:prstGeom prst="rect">
+            <a:avLst/>
+          </a:prstGeom>
+        </p:spPr>
+      </p:pic>
       <p:sp>
         <p:nvSpPr>
           <p:cNvPr id="17" name="文本框 16"/>
@@ -6785,14 +5852,13 @@
           <a:noFill/>
         </p:spPr>
         <p:txBody>
-          <a:bodyPr wrap="square" rtlCol="0">
+          <a:bodyPr wrap="none" rtlCol="0">
             <a:noAutofit/>
           </a:bodyPr>
           <a:p>
             <a:r>
-              <a:rPr lang="en-US" altLang="zh-CN" sz="1600" b="1">
-                <a:latin typeface="Arial" panose="020B0604020202020204" pitchFamily="34" charset="0"/>
-                <a:cs typeface="Arial" panose="020B0604020202020204" pitchFamily="34" charset="0"/>
+              <a:rPr b="1" sz="1600">
+                <a:latin typeface="Arial"/>
               </a:rPr>
               <a:t>(a)</a:t>
             </a:r>
@@ -6820,14 +5886,13 @@
           <a:noFill/>
         </p:spPr>
         <p:txBody>
-          <a:bodyPr wrap="square" rtlCol="0">
+          <a:bodyPr wrap="none" rtlCol="0">
             <a:noAutofit/>
           </a:bodyPr>
           <a:p>
             <a:r>
-              <a:rPr lang="en-US" altLang="zh-CN" sz="1600" b="1">
-                <a:latin typeface="Arial" panose="020B0604020202020204" pitchFamily="34" charset="0"/>
-                <a:cs typeface="Arial" panose="020B0604020202020204" pitchFamily="34" charset="0"/>
+              <a:rPr b="1" sz="1600">
+                <a:latin typeface="Arial"/>
               </a:rPr>
               <a:t>(b)</a:t>
             </a:r>
@@ -6855,14 +5920,13 @@
           <a:noFill/>
         </p:spPr>
         <p:txBody>
-          <a:bodyPr wrap="square" rtlCol="0">
+          <a:bodyPr wrap="none" rtlCol="0">
             <a:noAutofit/>
           </a:bodyPr>
           <a:p>
             <a:r>
-              <a:rPr lang="en-US" altLang="zh-CN" sz="1600" b="1">
-                <a:latin typeface="Arial" panose="020B0604020202020204" pitchFamily="34" charset="0"/>
-                <a:cs typeface="Arial" panose="020B0604020202020204" pitchFamily="34" charset="0"/>
+              <a:rPr b="1" sz="1600">
+                <a:latin typeface="Arial"/>
               </a:rPr>
               <a:t>(c)</a:t>
             </a:r>
@@ -6890,14 +5954,13 @@
           <a:noFill/>
         </p:spPr>
         <p:txBody>
-          <a:bodyPr wrap="square" rtlCol="0">
+          <a:bodyPr wrap="none" rtlCol="0">
             <a:noAutofit/>
           </a:bodyPr>
           <a:p>
             <a:r>
-              <a:rPr lang="en-US" altLang="zh-CN" sz="1600" b="1">
-                <a:latin typeface="Arial" panose="020B0604020202020204" pitchFamily="34" charset="0"/>
-                <a:cs typeface="Arial" panose="020B0604020202020204" pitchFamily="34" charset="0"/>
+              <a:rPr b="1" sz="1600">
+                <a:latin typeface="Arial"/>
               </a:rPr>
               <a:t>(d)</a:t>
             </a:r>
@@ -6917,7 +5980,7 @@
 </file>
 
 <file path=ppt/slides/slide8.xml><?xml version="1.0" encoding="utf-8"?>
-<p:sld xmlns:a="http://schemas.openxmlformats.org/drawingml/2006/main" xmlns:p="http://schemas.openxmlformats.org/presentationml/2006/main" xmlns:r="http://schemas.openxmlformats.org/officeDocument/2006/relationships">
+<p:sld xmlns:a="http://schemas.openxmlformats.org/drawingml/2006/main" xmlns:r="http://schemas.openxmlformats.org/officeDocument/2006/relationships" xmlns:p="http://schemas.openxmlformats.org/presentationml/2006/main">
   <p:cSld>
     <p:spTree>
       <p:nvGrpSpPr>
@@ -6972,14 +6035,14 @@
       </p:sp>
       <p:pic>
         <p:nvPicPr>
-          <p:cNvPr id="3" name="Picture 2" descr="ch05_09_a.png"/>
+          <p:cNvPr id="3" name="Picture 2" descr="Chapter05_local_08.png"/>
           <p:cNvPicPr>
             <a:picLocks noChangeAspect="1"/>
           </p:cNvPicPr>
           <p:nvPr/>
         </p:nvPicPr>
         <p:blipFill>
-          <a:blip r:embed="rId2"/>
+          <a:blip r:embed="rId1"/>
           <a:stretch>
             <a:fillRect/>
           </a:stretch>
@@ -6987,160 +6050,13 @@
         <p:spPr>
           <a:xfrm>
             <a:off x="228600" y="502920"/>
-            <a:ext cx="2810256" cy="2893454"/>
+            <a:ext cx="8686800" cy="4540827"/>
           </a:xfrm>
           <a:prstGeom prst="rect">
             <a:avLst/>
           </a:prstGeom>
         </p:spPr>
       </p:pic>
-      <p:sp>
-        <p:nvSpPr>
-          <p:cNvPr id="4" name="TextBox 3"/>
-          <p:cNvSpPr txBox="1"/>
-          <p:nvPr/>
-        </p:nvSpPr>
-        <p:spPr>
-          <a:xfrm>
-            <a:off x="274320" y="521208"/>
-            <a:ext cx="548640" cy="274320"/>
-          </a:xfrm>
-          <a:prstGeom prst="rect">
-            <a:avLst/>
-          </a:prstGeom>
-          <a:noFill/>
-        </p:spPr>
-        <p:txBody>
-          <a:bodyPr wrap="none" lIns="0" rIns="0" tIns="0" bIns="0">
-            <a:spAutoFit/>
-          </a:bodyPr>
-          <a:lstStyle/>
-          <a:p>
-            <a:r>
-              <a:rPr b="1" sz="1400">
-                <a:solidFill>
-                  <a:srgbClr val="202020"/>
-                </a:solidFill>
-              </a:rPr>
-              <a:t>(a)</a:t>
-            </a:r>
-          </a:p>
-        </p:txBody>
-      </p:sp>
-      <p:pic>
-        <p:nvPicPr>
-          <p:cNvPr id="5" name="Picture 4" descr="ch05_09_b.png"/>
-          <p:cNvPicPr>
-            <a:picLocks noChangeAspect="1"/>
-          </p:cNvPicPr>
-          <p:nvPr/>
-        </p:nvPicPr>
-        <p:blipFill>
-          <a:blip r:embed="rId3"/>
-          <a:stretch>
-            <a:fillRect/>
-          </a:stretch>
-        </p:blipFill>
-        <p:spPr>
-          <a:xfrm>
-            <a:off x="3166872" y="502920"/>
-            <a:ext cx="2810256" cy="2353716"/>
-          </a:xfrm>
-          <a:prstGeom prst="rect">
-            <a:avLst/>
-          </a:prstGeom>
-        </p:spPr>
-      </p:pic>
-      <p:sp>
-        <p:nvSpPr>
-          <p:cNvPr id="6" name="TextBox 5"/>
-          <p:cNvSpPr txBox="1"/>
-          <p:nvPr/>
-        </p:nvSpPr>
-        <p:spPr>
-          <a:xfrm>
-            <a:off x="3212592" y="521208"/>
-            <a:ext cx="548640" cy="274320"/>
-          </a:xfrm>
-          <a:prstGeom prst="rect">
-            <a:avLst/>
-          </a:prstGeom>
-          <a:noFill/>
-        </p:spPr>
-        <p:txBody>
-          <a:bodyPr wrap="none" lIns="0" rIns="0" tIns="0" bIns="0">
-            <a:spAutoFit/>
-          </a:bodyPr>
-          <a:lstStyle/>
-          <a:p>
-            <a:r>
-              <a:rPr b="1" sz="1400">
-                <a:solidFill>
-                  <a:srgbClr val="202020"/>
-                </a:solidFill>
-              </a:rPr>
-              <a:t>(b)</a:t>
-            </a:r>
-          </a:p>
-        </p:txBody>
-      </p:sp>
-      <p:pic>
-        <p:nvPicPr>
-          <p:cNvPr id="7" name="Picture 6" descr="ch05_09_c.png"/>
-          <p:cNvPicPr>
-            <a:picLocks noChangeAspect="1"/>
-          </p:cNvPicPr>
-          <p:nvPr/>
-        </p:nvPicPr>
-        <p:blipFill>
-          <a:blip r:embed="rId4"/>
-          <a:stretch>
-            <a:fillRect/>
-          </a:stretch>
-        </p:blipFill>
-        <p:spPr>
-          <a:xfrm>
-            <a:off x="6105144" y="502920"/>
-            <a:ext cx="2810256" cy="2221130"/>
-          </a:xfrm>
-          <a:prstGeom prst="rect">
-            <a:avLst/>
-          </a:prstGeom>
-        </p:spPr>
-      </p:pic>
-      <p:sp>
-        <p:nvSpPr>
-          <p:cNvPr id="8" name="TextBox 7"/>
-          <p:cNvSpPr txBox="1"/>
-          <p:nvPr/>
-        </p:nvSpPr>
-        <p:spPr>
-          <a:xfrm>
-            <a:off x="6150864" y="521208"/>
-            <a:ext cx="548640" cy="274320"/>
-          </a:xfrm>
-          <a:prstGeom prst="rect">
-            <a:avLst/>
-          </a:prstGeom>
-          <a:noFill/>
-        </p:spPr>
-        <p:txBody>
-          <a:bodyPr wrap="none" lIns="0" rIns="0" tIns="0" bIns="0">
-            <a:spAutoFit/>
-          </a:bodyPr>
-          <a:lstStyle/>
-          <a:p>
-            <a:r>
-              <a:rPr b="1" sz="1400">
-                <a:solidFill>
-                  <a:srgbClr val="202020"/>
-                </a:solidFill>
-              </a:rPr>
-              <a:t>(c)</a:t>
-            </a:r>
-          </a:p>
-        </p:txBody>
-      </p:sp>
     </p:spTree>
   </p:cSld>
   <p:clrMapOvr>
@@ -7150,7 +6066,7 @@
 </file>
 
 <file path=ppt/slides/slide9.xml><?xml version="1.0" encoding="utf-8"?>
-<p:sld xmlns:a="http://schemas.openxmlformats.org/drawingml/2006/main" xmlns:p="http://schemas.openxmlformats.org/presentationml/2006/main" xmlns:r="http://schemas.openxmlformats.org/officeDocument/2006/relationships">
+<p:sld xmlns:a="http://schemas.openxmlformats.org/drawingml/2006/main" xmlns:r="http://schemas.openxmlformats.org/officeDocument/2006/relationships" xmlns:p="http://schemas.openxmlformats.org/presentationml/2006/main">
   <p:cSld>
     <p:spTree>
       <p:nvGrpSpPr>
@@ -7205,14 +6121,14 @@
       </p:sp>
       <p:pic>
         <p:nvPicPr>
-          <p:cNvPr id="3" name="Picture 2" descr="Chapter05_local_08.png"/>
+          <p:cNvPr id="3" name="Picture 2" descr="ch05_09_a.png"/>
           <p:cNvPicPr>
             <a:picLocks noChangeAspect="1"/>
           </p:cNvPicPr>
           <p:nvPr/>
         </p:nvPicPr>
         <p:blipFill>
-          <a:blip r:embed="rId2"/>
+          <a:blip r:embed="rId6"/>
           <a:stretch>
             <a:fillRect/>
           </a:stretch>
@@ -7220,13 +6136,160 @@
         <p:spPr>
           <a:xfrm>
             <a:off x="228600" y="502920"/>
-            <a:ext cx="8686800" cy="4540827"/>
+            <a:ext cx="2810256" cy="2899814"/>
           </a:xfrm>
           <a:prstGeom prst="rect">
             <a:avLst/>
           </a:prstGeom>
         </p:spPr>
       </p:pic>
+      <p:sp>
+        <p:nvSpPr>
+          <p:cNvPr id="4" name="TextBox 3"/>
+          <p:cNvSpPr txBox="1"/>
+          <p:nvPr/>
+        </p:nvSpPr>
+        <p:spPr>
+          <a:xfrm>
+            <a:off x="274320" y="521208"/>
+            <a:ext cx="548640" cy="274320"/>
+          </a:xfrm>
+          <a:prstGeom prst="rect">
+            <a:avLst/>
+          </a:prstGeom>
+          <a:noFill/>
+        </p:spPr>
+        <p:txBody>
+          <a:bodyPr wrap="none" lIns="0" rIns="0" tIns="0" bIns="0">
+            <a:spAutoFit/>
+          </a:bodyPr>
+          <a:lstStyle/>
+          <a:p>
+            <a:r>
+              <a:rPr b="1" sz="1400">
+                <a:solidFill>
+                  <a:srgbClr val="202020"/>
+                </a:solidFill>
+              </a:rPr>
+              <a:t>(a)</a:t>
+            </a:r>
+          </a:p>
+        </p:txBody>
+      </p:sp>
+      <p:pic>
+        <p:nvPicPr>
+          <p:cNvPr id="5" name="Picture 4" descr="ch05_09_b.png"/>
+          <p:cNvPicPr>
+            <a:picLocks noChangeAspect="1"/>
+          </p:cNvPicPr>
+          <p:nvPr/>
+        </p:nvPicPr>
+        <p:blipFill>
+          <a:blip r:embed="rId7"/>
+          <a:stretch>
+            <a:fillRect/>
+          </a:stretch>
+        </p:blipFill>
+        <p:spPr>
+          <a:xfrm>
+            <a:off x="3166872" y="502920"/>
+            <a:ext cx="2810256" cy="2364386"/>
+          </a:xfrm>
+          <a:prstGeom prst="rect">
+            <a:avLst/>
+          </a:prstGeom>
+        </p:spPr>
+      </p:pic>
+      <p:sp>
+        <p:nvSpPr>
+          <p:cNvPr id="6" name="TextBox 5"/>
+          <p:cNvSpPr txBox="1"/>
+          <p:nvPr/>
+        </p:nvSpPr>
+        <p:spPr>
+          <a:xfrm>
+            <a:off x="3212592" y="521208"/>
+            <a:ext cx="548640" cy="274320"/>
+          </a:xfrm>
+          <a:prstGeom prst="rect">
+            <a:avLst/>
+          </a:prstGeom>
+          <a:noFill/>
+        </p:spPr>
+        <p:txBody>
+          <a:bodyPr wrap="none" lIns="0" rIns="0" tIns="0" bIns="0">
+            <a:spAutoFit/>
+          </a:bodyPr>
+          <a:lstStyle/>
+          <a:p>
+            <a:r>
+              <a:rPr b="1" sz="1400">
+                <a:solidFill>
+                  <a:srgbClr val="202020"/>
+                </a:solidFill>
+              </a:rPr>
+              <a:t>(b)</a:t>
+            </a:r>
+          </a:p>
+        </p:txBody>
+      </p:sp>
+      <p:pic>
+        <p:nvPicPr>
+          <p:cNvPr id="7" name="Picture 6" descr="ch05_09_c.png"/>
+          <p:cNvPicPr>
+            <a:picLocks noChangeAspect="1"/>
+          </p:cNvPicPr>
+          <p:nvPr/>
+        </p:nvPicPr>
+        <p:blipFill>
+          <a:blip r:embed="rId8"/>
+          <a:stretch>
+            <a:fillRect/>
+          </a:stretch>
+        </p:blipFill>
+        <p:spPr>
+          <a:xfrm>
+            <a:off x="6105144" y="502920"/>
+            <a:ext cx="2810256" cy="2369065"/>
+          </a:xfrm>
+          <a:prstGeom prst="rect">
+            <a:avLst/>
+          </a:prstGeom>
+        </p:spPr>
+      </p:pic>
+      <p:sp>
+        <p:nvSpPr>
+          <p:cNvPr id="8" name="TextBox 7"/>
+          <p:cNvSpPr txBox="1"/>
+          <p:nvPr/>
+        </p:nvSpPr>
+        <p:spPr>
+          <a:xfrm>
+            <a:off x="6150864" y="521208"/>
+            <a:ext cx="548640" cy="274320"/>
+          </a:xfrm>
+          <a:prstGeom prst="rect">
+            <a:avLst/>
+          </a:prstGeom>
+          <a:noFill/>
+        </p:spPr>
+        <p:txBody>
+          <a:bodyPr wrap="none" lIns="0" rIns="0" tIns="0" bIns="0">
+            <a:spAutoFit/>
+          </a:bodyPr>
+          <a:lstStyle/>
+          <a:p>
+            <a:r>
+              <a:rPr b="1" sz="1400">
+                <a:solidFill>
+                  <a:srgbClr val="202020"/>
+                </a:solidFill>
+              </a:rPr>
+              <a:t>(c)</a:t>
+            </a:r>
+          </a:p>
+        </p:txBody>
+      </p:sp>
     </p:spTree>
   </p:cSld>
   <p:clrMapOvr>

--- a/article/ppt/Chapter05_local.pptx
+++ b/article/ppt/Chapter05_local.pptx
@@ -6097,20 +6097,6 @@
           </a:ln>
           <a:effectLst/>
         </p:spPr>
-        <p:style>
-          <a:lnRef idx="1">
-            <a:schemeClr val="accent1"/>
-          </a:lnRef>
-          <a:fillRef idx="3">
-            <a:schemeClr val="accent1"/>
-          </a:fillRef>
-          <a:effectRef idx="2">
-            <a:schemeClr val="accent1"/>
-          </a:effectRef>
-          <a:fontRef idx="minor">
-            <a:schemeClr val="lt1"/>
-          </a:fontRef>
-        </p:style>
         <p:txBody>
           <a:bodyPr rtlCol="0" anchor="ctr"/>
           <a:lstStyle/>
@@ -6121,7 +6107,7 @@
       </p:sp>
       <p:pic>
         <p:nvPicPr>
-          <p:cNvPr id="3" name="Picture 2" descr="ch05_09_a.png"/>
+          <p:cNvPr id="3" name="Picture 2" descr="image.png"/>
           <p:cNvPicPr>
             <a:picLocks noChangeAspect="1"/>
           </p:cNvPicPr>
@@ -6178,7 +6164,7 @@
       </p:sp>
       <p:pic>
         <p:nvPicPr>
-          <p:cNvPr id="5" name="Picture 4" descr="ch05_09_b.png"/>
+          <p:cNvPr id="5" name="Picture 4" descr="image.png"/>
           <p:cNvPicPr>
             <a:picLocks noChangeAspect="1"/>
           </p:cNvPicPr>
@@ -6235,7 +6221,7 @@
       </p:sp>
       <p:pic>
         <p:nvPicPr>
-          <p:cNvPr id="7" name="Picture 6" descr="ch05_09_c.png"/>
+          <p:cNvPr id="7" name="Picture 6" descr="image.png"/>
           <p:cNvPicPr>
             <a:picLocks noChangeAspect="1"/>
           </p:cNvPicPr>

--- a/article/ppt/Chapter05_local.pptx
+++ b/article/ppt/Chapter05_local.pptx
@@ -6228,7 +6228,7 @@
           <p:nvPr/>
         </p:nvPicPr>
         <p:blipFill>
-          <a:blip r:embed="rId8"/>
+          <a:blip r:embed="rId9"/>
           <a:stretch>
             <a:fillRect/>
           </a:stretch>

--- a/article/ppt/Chapter05_local.pptx
+++ b/article/ppt/Chapter05_local.pptx
@@ -18,6 +18,7 @@
     <p:sldId id="272" r:id="rId11"/>
     <p:sldId id="271" r:id="rId12"/>
     <p:sldId id="273" r:id="rId13"/>
+    <p:sldId id="274" r:id="rId17"/>
   </p:sldIdLst>
   <p:sldSz cx="9144000" cy="6858000" type="screen4x3"/>
   <p:notesSz cx="6858000" cy="9144000"/>
@@ -594,6 +595,76 @@
           </p:cNvSpPr>
           <p:nvPr>
             <p:ph type="sldNum" sz="quarter" idx="5"/>
+          </p:nvPr>
+        </p:nvSpPr>
+        <p:spPr/>
+      </p:sp>
+    </p:spTree>
+  </p:cSld>
+  <p:clrMapOvr>
+    <a:masterClrMapping/>
+  </p:clrMapOvr>
+</p:notes>
+</file>
+
+<file path=ppt/notesSlides/notesSlide11.xml><?xml version="1.0" encoding="utf-8"?>
+<p:notes xmlns:a="http://schemas.openxmlformats.org/drawingml/2006/main" xmlns:p="http://schemas.openxmlformats.org/presentationml/2006/main" xmlns:r="http://schemas.openxmlformats.org/officeDocument/2006/relationships">
+  <p:cSld>
+    <p:spTree>
+      <p:nvGrpSpPr>
+        <p:cNvPr id="1" name=""/>
+        <p:cNvGrpSpPr/>
+        <p:nvPr/>
+      </p:nvGrpSpPr>
+      <p:grpSpPr>
+        <a:xfrm>
+          <a:off x="0" y="0"/>
+          <a:ext cx="0" cy="0"/>
+          <a:chOff x="0" y="0"/>
+          <a:chExt cx="0" cy="0"/>
+        </a:xfrm>
+      </p:grpSpPr>
+      <p:sp>
+        <p:nvSpPr>
+          <p:cNvPr id="2" name="Slide Image Placeholder 1"/>
+          <p:cNvSpPr>
+            <a:spLocks noGrp="1"/>
+          </p:cNvSpPr>
+          <p:nvPr>
+            <p:ph type="sldImg" idx="2"/>
+          </p:nvPr>
+        </p:nvSpPr>
+        <p:spPr/>
+      </p:sp>
+      <p:sp>
+        <p:nvSpPr>
+          <p:cNvPr id="3" name="Notes Placeholder 2"/>
+          <p:cNvSpPr>
+            <a:spLocks noGrp="1"/>
+          </p:cNvSpPr>
+          <p:nvPr>
+            <p:ph type="body" idx="3" sz="quarter"/>
+          </p:nvPr>
+        </p:nvSpPr>
+        <p:spPr/>
+        <p:txBody>
+          <a:bodyPr/>
+          <a:lstStyle/>
+          <a:p>
+            <a:r>
+              <a:t>FIG:11</a:t>
+            </a:r>
+          </a:p>
+        </p:txBody>
+      </p:sp>
+      <p:sp>
+        <p:nvSpPr>
+          <p:cNvPr id="4" name="Slide Number Placeholder 3"/>
+          <p:cNvSpPr>
+            <a:spLocks noGrp="1"/>
+          </p:cNvSpPr>
+          <p:nvPr>
+            <p:ph type="sldNum" idx="5" sz="quarter"/>
           </p:nvPr>
         </p:nvSpPr>
         <p:spPr/>
@@ -4220,6 +4291,144 @@
           </a:prstGeom>
         </p:spPr>
       </p:pic>
+    </p:spTree>
+  </p:cSld>
+  <p:clrMapOvr>
+    <a:masterClrMapping/>
+  </p:clrMapOvr>
+</p:sld>
+</file>
+
+<file path=ppt/slides/slide11.xml><?xml version="1.0" encoding="utf-8"?>
+<p:sld xmlns:a="http://schemas.openxmlformats.org/drawingml/2006/main" xmlns:p="http://schemas.openxmlformats.org/presentationml/2006/main" xmlns:r="http://schemas.openxmlformats.org/officeDocument/2006/relationships">
+  <p:cSld>
+    <p:spTree>
+      <p:nvGrpSpPr>
+        <p:cNvPr id="1" name=""/>
+        <p:cNvGrpSpPr/>
+        <p:nvPr/>
+      </p:nvGrpSpPr>
+      <p:grpSpPr/>
+      <p:sp>
+        <p:nvSpPr>
+          <p:cNvPr id="2" name="Rectangle 1"/>
+          <p:cNvSpPr/>
+          <p:nvPr/>
+        </p:nvSpPr>
+        <p:spPr>
+          <a:xfrm>
+            <a:off x="0" y="0"/>
+            <a:ext cx="9144000" cy="6858000"/>
+          </a:xfrm>
+          <a:prstGeom prst="rect">
+            <a:avLst/>
+          </a:prstGeom>
+          <a:solidFill>
+            <a:srgbClr val="FFFFFF"/>
+          </a:solidFill>
+          <a:ln>
+            <a:noFill/>
+          </a:ln>
+          <a:effectLst/>
+        </p:spPr>
+        <p:txBody>
+          <a:bodyPr rtlCol="0" anchor="ctr"/>
+          <a:lstStyle/>
+          <a:p>
+            <a:pPr algn="ctr"/>
+          </a:p>
+        </p:txBody>
+      </p:sp>
+      <p:pic>
+        <p:nvPicPr>
+          <p:cNvPr id="3" name="Picture 2" descr="31_rc_counting_readout.png"/>
+          <p:cNvPicPr>
+            <a:picLocks noChangeAspect="1"/>
+          </p:cNvPicPr>
+          <p:nvPr/>
+        </p:nvPicPr>
+        <p:blipFill>
+          <a:blip r:embed="rId2"/>
+          <a:stretch>
+            <a:fillRect/>
+          </a:stretch>
+        </p:blipFill>
+        <p:spPr>
+          <a:xfrm>
+            <a:off x="228600" y="502920"/>
+            <a:ext cx="8686800" cy="3376059"/>
+          </a:xfrm>
+          <a:prstGeom prst="rect">
+            <a:avLst/>
+          </a:prstGeom>
+        </p:spPr>
+      </p:pic>
+      <p:sp>
+        <p:nvSpPr>
+          <p:cNvPr id="4" name="TextBox 3"/>
+          <p:cNvSpPr txBox="1"/>
+          <p:nvPr/>
+        </p:nvSpPr>
+        <p:spPr>
+          <a:xfrm>
+            <a:off x="441841" y="361670"/>
+            <a:ext cx="548640" cy="274320"/>
+          </a:xfrm>
+          <a:prstGeom prst="rect">
+            <a:avLst/>
+          </a:prstGeom>
+          <a:noFill/>
+        </p:spPr>
+        <p:txBody>
+          <a:bodyPr wrap="none" lIns="0" rIns="0" tIns="0" bIns="0">
+            <a:spAutoFit/>
+          </a:bodyPr>
+          <a:lstStyle/>
+          <a:p>
+            <a:r>
+              <a:rPr b="1" sz="1400">
+                <a:solidFill>
+                  <a:srgbClr val="202020"/>
+                </a:solidFill>
+              </a:rPr>
+              <a:t>(a)</a:t>
+            </a:r>
+          </a:p>
+        </p:txBody>
+      </p:sp>
+      <p:sp>
+        <p:nvSpPr>
+          <p:cNvPr id="5" name="TextBox 4"/>
+          <p:cNvSpPr txBox="1"/>
+          <p:nvPr/>
+        </p:nvSpPr>
+        <p:spPr>
+          <a:xfrm>
+            <a:off x="4654206" y="361670"/>
+            <a:ext cx="548640" cy="274320"/>
+          </a:xfrm>
+          <a:prstGeom prst="rect">
+            <a:avLst/>
+          </a:prstGeom>
+          <a:noFill/>
+        </p:spPr>
+        <p:txBody>
+          <a:bodyPr wrap="none" lIns="0" rIns="0" tIns="0" bIns="0">
+            <a:spAutoFit/>
+          </a:bodyPr>
+          <a:lstStyle/>
+          <a:p>
+            <a:r>
+              <a:rPr b="1" sz="1400">
+                <a:solidFill>
+                  <a:srgbClr val="202020"/>
+                </a:solidFill>
+              </a:rPr>
+              <a:t>(b)</a:t>
+            </a:r>
+          </a:p>
+        </p:txBody>
+      </p:sp>
     </p:spTree>
   </p:cSld>
   <p:clrMapOvr>

--- a/article/ppt/Chapter05_local.pptx
+++ b/article/ppt/Chapter05_local.pptx
@@ -4341,7 +4341,7 @@
       </p:sp>
       <p:pic>
         <p:nvPicPr>
-          <p:cNvPr id="3" name="Picture 2" descr="31_rc_counting_readout.png"/>
+          <p:cNvPr id="3" name="Picture 2" descr="image.png"/>
           <p:cNvPicPr>
             <a:picLocks noChangeAspect="1"/>
           </p:cNvPicPr>
@@ -5202,7 +5202,7 @@
           <p:spPr>
             <a:xfrm>
               <a:off x="0" y="1040"/>
-              <a:ext cx="14400" cy="9517"/>
+              <a:ext cx="14400" cy="10315"/>
             </a:xfrm>
             <a:prstGeom prst="rect">
               <a:avLst/>

--- a/article/ppt/Chapter05_local.pptx
+++ b/article/ppt/Chapter05_local.pptx
@@ -19,6 +19,8 @@
     <p:sldId id="271" r:id="rId12"/>
     <p:sldId id="273" r:id="rId13"/>
     <p:sldId id="274" r:id="rId17"/>
+    <p:sldId id="275" r:id="rId18"/>
+    <p:sldId id="276" r:id="rId19"/>
   </p:sldIdLst>
   <p:sldSz cx="9144000" cy="6858000" type="screen4x3"/>
   <p:notesSz cx="6858000" cy="9144000"/>
@@ -653,6 +655,146 @@
           <a:p>
             <a:r>
               <a:t>FIG:11</a:t>
+            </a:r>
+          </a:p>
+        </p:txBody>
+      </p:sp>
+      <p:sp>
+        <p:nvSpPr>
+          <p:cNvPr id="4" name="Slide Number Placeholder 3"/>
+          <p:cNvSpPr>
+            <a:spLocks noGrp="1"/>
+          </p:cNvSpPr>
+          <p:nvPr>
+            <p:ph type="sldNum" idx="5" sz="quarter"/>
+          </p:nvPr>
+        </p:nvSpPr>
+        <p:spPr/>
+      </p:sp>
+    </p:spTree>
+  </p:cSld>
+  <p:clrMapOvr>
+    <a:masterClrMapping/>
+  </p:clrMapOvr>
+</p:notes>
+</file>
+
+<file path=ppt/notesSlides/notesSlide12.xml><?xml version="1.0" encoding="utf-8"?>
+<p:notes xmlns:a="http://schemas.openxmlformats.org/drawingml/2006/main" xmlns:p="http://schemas.openxmlformats.org/presentationml/2006/main" xmlns:r="http://schemas.openxmlformats.org/officeDocument/2006/relationships">
+  <p:cSld>
+    <p:spTree>
+      <p:nvGrpSpPr>
+        <p:cNvPr id="1" name=""/>
+        <p:cNvGrpSpPr/>
+        <p:nvPr/>
+      </p:nvGrpSpPr>
+      <p:grpSpPr>
+        <a:xfrm>
+          <a:off x="0" y="0"/>
+          <a:ext cx="0" cy="0"/>
+          <a:chOff x="0" y="0"/>
+          <a:chExt cx="0" cy="0"/>
+        </a:xfrm>
+      </p:grpSpPr>
+      <p:sp>
+        <p:nvSpPr>
+          <p:cNvPr id="2" name="Slide Image Placeholder 1"/>
+          <p:cNvSpPr>
+            <a:spLocks noGrp="1"/>
+          </p:cNvSpPr>
+          <p:nvPr>
+            <p:ph type="sldImg" idx="2"/>
+          </p:nvPr>
+        </p:nvSpPr>
+        <p:spPr/>
+      </p:sp>
+      <p:sp>
+        <p:nvSpPr>
+          <p:cNvPr id="3" name="Notes Placeholder 2"/>
+          <p:cNvSpPr>
+            <a:spLocks noGrp="1"/>
+          </p:cNvSpPr>
+          <p:nvPr>
+            <p:ph type="body" idx="3" sz="quarter"/>
+          </p:nvPr>
+        </p:nvSpPr>
+        <p:spPr/>
+        <p:txBody>
+          <a:bodyPr/>
+          <a:lstStyle/>
+          <a:p>
+            <a:r>
+              <a:t>FIG:12</a:t>
+            </a:r>
+          </a:p>
+        </p:txBody>
+      </p:sp>
+      <p:sp>
+        <p:nvSpPr>
+          <p:cNvPr id="4" name="Slide Number Placeholder 3"/>
+          <p:cNvSpPr>
+            <a:spLocks noGrp="1"/>
+          </p:cNvSpPr>
+          <p:nvPr>
+            <p:ph type="sldNum" idx="5" sz="quarter"/>
+          </p:nvPr>
+        </p:nvSpPr>
+        <p:spPr/>
+      </p:sp>
+    </p:spTree>
+  </p:cSld>
+  <p:clrMapOvr>
+    <a:masterClrMapping/>
+  </p:clrMapOvr>
+</p:notes>
+</file>
+
+<file path=ppt/notesSlides/notesSlide13.xml><?xml version="1.0" encoding="utf-8"?>
+<p:notes xmlns:a="http://schemas.openxmlformats.org/drawingml/2006/main" xmlns:p="http://schemas.openxmlformats.org/presentationml/2006/main" xmlns:r="http://schemas.openxmlformats.org/officeDocument/2006/relationships">
+  <p:cSld>
+    <p:spTree>
+      <p:nvGrpSpPr>
+        <p:cNvPr id="1" name=""/>
+        <p:cNvGrpSpPr/>
+        <p:nvPr/>
+      </p:nvGrpSpPr>
+      <p:grpSpPr>
+        <a:xfrm>
+          <a:off x="0" y="0"/>
+          <a:ext cx="0" cy="0"/>
+          <a:chOff x="0" y="0"/>
+          <a:chExt cx="0" cy="0"/>
+        </a:xfrm>
+      </p:grpSpPr>
+      <p:sp>
+        <p:nvSpPr>
+          <p:cNvPr id="2" name="Slide Image Placeholder 1"/>
+          <p:cNvSpPr>
+            <a:spLocks noGrp="1"/>
+          </p:cNvSpPr>
+          <p:nvPr>
+            <p:ph type="sldImg" idx="2"/>
+          </p:nvPr>
+        </p:nvSpPr>
+        <p:spPr/>
+      </p:sp>
+      <p:sp>
+        <p:nvSpPr>
+          <p:cNvPr id="3" name="Notes Placeholder 2"/>
+          <p:cNvSpPr>
+            <a:spLocks noGrp="1"/>
+          </p:cNvSpPr>
+          <p:nvPr>
+            <p:ph type="body" idx="3" sz="quarter"/>
+          </p:nvPr>
+        </p:nvSpPr>
+        <p:spPr/>
+        <p:txBody>
+          <a:bodyPr/>
+          <a:lstStyle/>
+          <a:p>
+            <a:r>
+              <a:t>FIG:13</a:t>
             </a:r>
           </a:p>
         </p:txBody>
@@ -4429,6 +4571,216 @@
           </a:p>
         </p:txBody>
       </p:sp>
+    </p:spTree>
+  </p:cSld>
+  <p:clrMapOvr>
+    <a:masterClrMapping/>
+  </p:clrMapOvr>
+</p:sld>
+</file>
+
+<file path=ppt/slides/slide12.xml><?xml version="1.0" encoding="utf-8"?>
+<p:sld xmlns:a="http://schemas.openxmlformats.org/drawingml/2006/main" xmlns:p="http://schemas.openxmlformats.org/presentationml/2006/main" xmlns:r="http://schemas.openxmlformats.org/officeDocument/2006/relationships">
+  <p:cSld>
+    <p:spTree>
+      <p:nvGrpSpPr>
+        <p:cNvPr id="1" name=""/>
+        <p:cNvGrpSpPr/>
+        <p:nvPr/>
+      </p:nvGrpSpPr>
+      <p:grpSpPr/>
+      <p:sp>
+        <p:nvSpPr>
+          <p:cNvPr id="2" name="Rectangle 1"/>
+          <p:cNvSpPr/>
+          <p:nvPr/>
+        </p:nvSpPr>
+        <p:spPr>
+          <a:xfrm>
+            <a:off x="0" y="0"/>
+            <a:ext cx="9144000" cy="6858000"/>
+          </a:xfrm>
+          <a:prstGeom prst="rect">
+            <a:avLst/>
+          </a:prstGeom>
+          <a:solidFill>
+            <a:srgbClr val="FFFFFF"/>
+          </a:solidFill>
+          <a:ln>
+            <a:noFill/>
+          </a:ln>
+          <a:effectLst/>
+        </p:spPr>
+        <p:txBody>
+          <a:bodyPr rtlCol="0" anchor="ctr"/>
+          <a:lstStyle/>
+          <a:p>
+            <a:pPr algn="ctr"/>
+          </a:p>
+        </p:txBody>
+      </p:sp>
+      <p:pic>
+        <p:nvPicPr>
+          <p:cNvPr id="3" name="Picture 2" descr="image.png"/>
+          <p:cNvPicPr>
+            <a:picLocks noChangeAspect="1"/>
+          </p:cNvPicPr>
+          <p:nvPr/>
+        </p:nvPicPr>
+        <p:blipFill>
+          <a:blip r:embed="rId2"/>
+          <a:stretch>
+            <a:fillRect/>
+          </a:stretch>
+        </p:blipFill>
+        <p:spPr>
+          <a:xfrm>
+            <a:off x="228600" y="502920"/>
+            <a:ext cx="8686800" cy="3474720"/>
+          </a:xfrm>
+          <a:prstGeom prst="rect">
+            <a:avLst/>
+          </a:prstGeom>
+        </p:spPr>
+      </p:pic>
+      <p:sp>
+        <p:nvSpPr>
+          <p:cNvPr id="4" name="TextBox 3"/>
+          <p:cNvSpPr txBox="1"/>
+          <p:nvPr/>
+        </p:nvSpPr>
+        <p:spPr>
+          <a:xfrm>
+            <a:off x="311505" y="401482"/>
+            <a:ext cx="548640" cy="274320"/>
+          </a:xfrm>
+          <a:prstGeom prst="rect">
+            <a:avLst/>
+          </a:prstGeom>
+          <a:noFill/>
+        </p:spPr>
+        <p:txBody>
+          <a:bodyPr wrap="none" lIns="0" rIns="0" tIns="0" bIns="0">
+            <a:spAutoFit/>
+          </a:bodyPr>
+          <a:lstStyle/>
+          <a:p>
+            <a:r>
+              <a:rPr b="1" sz="1400">
+                <a:solidFill>
+                  <a:srgbClr val="202020"/>
+                </a:solidFill>
+              </a:rPr>
+              <a:t>(a)</a:t>
+            </a:r>
+          </a:p>
+        </p:txBody>
+      </p:sp>
+      <p:sp>
+        <p:nvSpPr>
+          <p:cNvPr id="5" name="TextBox 4"/>
+          <p:cNvSpPr txBox="1"/>
+          <p:nvPr/>
+        </p:nvSpPr>
+        <p:spPr>
+          <a:xfrm>
+            <a:off x="4592360" y="401482"/>
+            <a:ext cx="548640" cy="274320"/>
+          </a:xfrm>
+          <a:prstGeom prst="rect">
+            <a:avLst/>
+          </a:prstGeom>
+          <a:noFill/>
+        </p:spPr>
+        <p:txBody>
+          <a:bodyPr wrap="none" lIns="0" rIns="0" tIns="0" bIns="0">
+            <a:spAutoFit/>
+          </a:bodyPr>
+          <a:lstStyle/>
+          <a:p>
+            <a:r>
+              <a:rPr b="1" sz="1400">
+                <a:solidFill>
+                  <a:srgbClr val="202020"/>
+                </a:solidFill>
+              </a:rPr>
+              <a:t>(b)</a:t>
+            </a:r>
+          </a:p>
+        </p:txBody>
+      </p:sp>
+    </p:spTree>
+  </p:cSld>
+  <p:clrMapOvr>
+    <a:masterClrMapping/>
+  </p:clrMapOvr>
+</p:sld>
+</file>
+
+<file path=ppt/slides/slide13.xml><?xml version="1.0" encoding="utf-8"?>
+<p:sld xmlns:a="http://schemas.openxmlformats.org/drawingml/2006/main" xmlns:p="http://schemas.openxmlformats.org/presentationml/2006/main" xmlns:r="http://schemas.openxmlformats.org/officeDocument/2006/relationships">
+  <p:cSld>
+    <p:spTree>
+      <p:nvGrpSpPr>
+        <p:cNvPr id="1" name=""/>
+        <p:cNvGrpSpPr/>
+        <p:nvPr/>
+      </p:nvGrpSpPr>
+      <p:grpSpPr/>
+      <p:sp>
+        <p:nvSpPr>
+          <p:cNvPr id="2" name="Rectangle 1"/>
+          <p:cNvSpPr/>
+          <p:nvPr/>
+        </p:nvSpPr>
+        <p:spPr>
+          <a:xfrm>
+            <a:off x="0" y="0"/>
+            <a:ext cx="9144000" cy="6858000"/>
+          </a:xfrm>
+          <a:prstGeom prst="rect">
+            <a:avLst/>
+          </a:prstGeom>
+          <a:solidFill>
+            <a:srgbClr val="FFFFFF"/>
+          </a:solidFill>
+          <a:ln>
+            <a:noFill/>
+          </a:ln>
+          <a:effectLst/>
+        </p:spPr>
+        <p:txBody>
+          <a:bodyPr rtlCol="0" anchor="ctr"/>
+          <a:lstStyle/>
+          <a:p>
+            <a:pPr algn="ctr"/>
+          </a:p>
+        </p:txBody>
+      </p:sp>
+      <p:pic>
+        <p:nvPicPr>
+          <p:cNvPr id="3" name="Picture 2" descr="34_dualmode_workingpoint.png"/>
+          <p:cNvPicPr>
+            <a:picLocks noChangeAspect="1"/>
+          </p:cNvPicPr>
+          <p:nvPr/>
+        </p:nvPicPr>
+        <p:blipFill>
+          <a:blip r:embed="rId2"/>
+          <a:stretch>
+            <a:fillRect/>
+          </a:stretch>
+        </p:blipFill>
+        <p:spPr>
+          <a:xfrm>
+            <a:off x="228600" y="502920"/>
+            <a:ext cx="8686800" cy="6032500"/>
+          </a:xfrm>
+          <a:prstGeom prst="rect">
+            <a:avLst/>
+          </a:prstGeom>
+        </p:spPr>
+      </p:pic>
     </p:spTree>
   </p:cSld>
   <p:clrMapOvr>

--- a/article/ppt/Chapter05_local.pptx
+++ b/article/ppt/Chapter05_local.pptx
@@ -13,14 +13,15 @@
     <p:sldId id="266" r:id="rId6"/>
     <p:sldId id="267" r:id="rId7"/>
     <p:sldId id="268" r:id="rId8"/>
+    <p:sldId id="275" r:id="rId18"/>
+    <p:sldId id="277" r:id="rId20"/>
     <p:sldId id="269" r:id="rId9"/>
     <p:sldId id="270" r:id="rId10"/>
     <p:sldId id="272" r:id="rId11"/>
     <p:sldId id="271" r:id="rId12"/>
+    <p:sldId id="274" r:id="rId17"/>
+    <p:sldId id="276" r:id="rId19"/>
     <p:sldId id="273" r:id="rId13"/>
-    <p:sldId id="274" r:id="rId17"/>
-    <p:sldId id="275" r:id="rId18"/>
-    <p:sldId id="276" r:id="rId19"/>
   </p:sldIdLst>
   <p:sldSz cx="9144000" cy="6858000" type="screen4x3"/>
   <p:notesSz cx="6858000" cy="9144000"/>
@@ -584,7 +585,7 @@
           <a:lstStyle/>
           <a:p>
             <a:r>
-              <a:t>FIG:10:VECTOR</a:t>
+              <a:t>FIG:14</a:t>
             </a:r>
           </a:p>
         </p:txBody>
@@ -654,7 +655,7 @@
           <a:lstStyle/>
           <a:p>
             <a:r>
-              <a:t>FIG:11</a:t>
+              <a:t>FIG:12</a:t>
             </a:r>
           </a:p>
         </p:txBody>
@@ -724,7 +725,7 @@
           <a:lstStyle/>
           <a:p>
             <a:r>
-              <a:t>FIG:12</a:t>
+              <a:t>FIG:06</a:t>
             </a:r>
           </a:p>
         </p:txBody>
@@ -819,6 +820,76 @@
 </p:notes>
 </file>
 
+<file path=ppt/notesSlides/notesSlide14.xml><?xml version="1.0" encoding="utf-8"?>
+<p:notes xmlns:a="http://schemas.openxmlformats.org/drawingml/2006/main" xmlns:p="http://schemas.openxmlformats.org/presentationml/2006/main" xmlns:r="http://schemas.openxmlformats.org/officeDocument/2006/relationships">
+  <p:cSld>
+    <p:spTree>
+      <p:nvGrpSpPr>
+        <p:cNvPr id="1" name=""/>
+        <p:cNvGrpSpPr/>
+        <p:nvPr/>
+      </p:nvGrpSpPr>
+      <p:grpSpPr>
+        <a:xfrm>
+          <a:off x="0" y="0"/>
+          <a:ext cx="0" cy="0"/>
+          <a:chOff x="0" y="0"/>
+          <a:chExt cx="0" cy="0"/>
+        </a:xfrm>
+      </p:grpSpPr>
+      <p:sp>
+        <p:nvSpPr>
+          <p:cNvPr id="2" name="Slide Image Placeholder 1"/>
+          <p:cNvSpPr>
+            <a:spLocks noGrp="1"/>
+          </p:cNvSpPr>
+          <p:nvPr>
+            <p:ph type="sldImg" idx="2"/>
+          </p:nvPr>
+        </p:nvSpPr>
+        <p:spPr/>
+      </p:sp>
+      <p:sp>
+        <p:nvSpPr>
+          <p:cNvPr id="3" name="Notes Placeholder 2"/>
+          <p:cNvSpPr>
+            <a:spLocks noGrp="1"/>
+          </p:cNvSpPr>
+          <p:nvPr>
+            <p:ph type="body" idx="3" sz="quarter"/>
+          </p:nvPr>
+        </p:nvSpPr>
+        <p:spPr/>
+        <p:txBody>
+          <a:bodyPr/>
+          <a:lstStyle/>
+          <a:p>
+            <a:r>
+              <a:t>FIG:07</a:t>
+            </a:r>
+          </a:p>
+        </p:txBody>
+      </p:sp>
+      <p:sp>
+        <p:nvSpPr>
+          <p:cNvPr id="4" name="Slide Number Placeholder 3"/>
+          <p:cNvSpPr>
+            <a:spLocks noGrp="1"/>
+          </p:cNvSpPr>
+          <p:nvPr>
+            <p:ph type="sldNum" idx="5" sz="quarter"/>
+          </p:nvPr>
+        </p:nvSpPr>
+        <p:spPr/>
+      </p:sp>
+    </p:spTree>
+  </p:cSld>
+  <p:clrMapOvr>
+    <a:masterClrMapping/>
+  </p:clrMapOvr>
+</p:notes>
+</file>
+
 <file path=ppt/notesSlides/notesSlide2.xml><?xml version="1.0" encoding="utf-8"?>
 <p:notes xmlns:a="http://schemas.openxmlformats.org/drawingml/2006/main" xmlns:r="http://schemas.openxmlformats.org/officeDocument/2006/relationships" xmlns:p="http://schemas.openxmlformats.org/presentationml/2006/main">
   <p:cSld>
@@ -1144,7 +1215,7 @@
           <a:lstStyle/>
           <a:p>
             <a:r>
-              <a:t>FIG:06</a:t>
+              <a:t>FIG:08</a:t>
             </a:r>
           </a:p>
         </p:txBody>
@@ -1214,7 +1285,7 @@
           <a:lstStyle/>
           <a:p>
             <a:r>
-              <a:t>FIG:07</a:t>
+              <a:t>FIG:09</a:t>
             </a:r>
           </a:p>
         </p:txBody>
@@ -1284,7 +1355,7 @@
           <a:lstStyle/>
           <a:p>
             <a:r>
-              <a:t>FIG:08:VECTOR</a:t>
+              <a:t>FIG:10</a:t>
             </a:r>
           </a:p>
         </p:txBody>
@@ -1354,7 +1425,7 @@
           <a:lstStyle/>
           <a:p>
             <a:r>
-              <a:t>FIG:09</a:t>
+              <a:t>FIG:11</a:t>
             </a:r>
           </a:p>
         </p:txBody>
@@ -4781,6 +4852,144 @@
           </a:prstGeom>
         </p:spPr>
       </p:pic>
+    </p:spTree>
+  </p:cSld>
+  <p:clrMapOvr>
+    <a:masterClrMapping/>
+  </p:clrMapOvr>
+</p:sld>
+</file>
+
+<file path=ppt/slides/slide14.xml><?xml version="1.0" encoding="utf-8"?>
+<p:sld xmlns:a="http://schemas.openxmlformats.org/drawingml/2006/main" xmlns:p="http://schemas.openxmlformats.org/presentationml/2006/main" xmlns:r="http://schemas.openxmlformats.org/officeDocument/2006/relationships">
+  <p:cSld>
+    <p:spTree>
+      <p:nvGrpSpPr>
+        <p:cNvPr id="1" name=""/>
+        <p:cNvGrpSpPr/>
+        <p:nvPr/>
+      </p:nvGrpSpPr>
+      <p:grpSpPr/>
+      <p:sp>
+        <p:nvSpPr>
+          <p:cNvPr id="2" name="Rectangle 1"/>
+          <p:cNvSpPr/>
+          <p:nvPr/>
+        </p:nvSpPr>
+        <p:spPr>
+          <a:xfrm>
+            <a:off x="0" y="0"/>
+            <a:ext cx="9144000" cy="6858000"/>
+          </a:xfrm>
+          <a:prstGeom prst="rect">
+            <a:avLst/>
+          </a:prstGeom>
+          <a:solidFill>
+            <a:srgbClr val="FFFFFF"/>
+          </a:solidFill>
+          <a:ln>
+            <a:noFill/>
+          </a:ln>
+          <a:effectLst/>
+        </p:spPr>
+        <p:txBody>
+          <a:bodyPr rtlCol="0" anchor="ctr"/>
+          <a:lstStyle/>
+          <a:p>
+            <a:pPr algn="ctr"/>
+          </a:p>
+        </p:txBody>
+      </p:sp>
+      <p:pic>
+        <p:nvPicPr>
+          <p:cNvPr id="3" name="Picture 2" descr="29_esp_certification.png"/>
+          <p:cNvPicPr>
+            <a:picLocks noChangeAspect="1"/>
+          </p:cNvPicPr>
+          <p:nvPr/>
+        </p:nvPicPr>
+        <p:blipFill>
+          <a:blip r:embed="rId2"/>
+          <a:stretch>
+            <a:fillRect/>
+          </a:stretch>
+        </p:blipFill>
+        <p:spPr>
+          <a:xfrm>
+            <a:off x="228600" y="502920"/>
+            <a:ext cx="8686800" cy="3592041"/>
+          </a:xfrm>
+          <a:prstGeom prst="rect">
+            <a:avLst/>
+          </a:prstGeom>
+        </p:spPr>
+      </p:pic>
+      <p:sp>
+        <p:nvSpPr>
+          <p:cNvPr id="4" name="TextBox 3"/>
+          <p:cNvSpPr txBox="1"/>
+          <p:nvPr/>
+        </p:nvSpPr>
+        <p:spPr>
+          <a:xfrm>
+            <a:off x="449992" y="372342"/>
+            <a:ext cx="548640" cy="274320"/>
+          </a:xfrm>
+          <a:prstGeom prst="rect">
+            <a:avLst/>
+          </a:prstGeom>
+          <a:noFill/>
+        </p:spPr>
+        <p:txBody>
+          <a:bodyPr wrap="none" lIns="0" rIns="0" tIns="0" bIns="0">
+            <a:spAutoFit/>
+          </a:bodyPr>
+          <a:lstStyle/>
+          <a:p>
+            <a:r>
+              <a:rPr b="1" sz="1400">
+                <a:solidFill>
+                  <a:srgbClr val="202020"/>
+                </a:solidFill>
+              </a:rPr>
+              <a:t>(a)</a:t>
+            </a:r>
+          </a:p>
+        </p:txBody>
+      </p:sp>
+      <p:sp>
+        <p:nvSpPr>
+          <p:cNvPr id="5" name="TextBox 4"/>
+          <p:cNvSpPr txBox="1"/>
+          <p:nvPr/>
+        </p:nvSpPr>
+        <p:spPr>
+          <a:xfrm>
+            <a:off x="4309987" y="372342"/>
+            <a:ext cx="548640" cy="274320"/>
+          </a:xfrm>
+          <a:prstGeom prst="rect">
+            <a:avLst/>
+          </a:prstGeom>
+          <a:noFill/>
+        </p:spPr>
+        <p:txBody>
+          <a:bodyPr wrap="none" lIns="0" rIns="0" tIns="0" bIns="0">
+            <a:spAutoFit/>
+          </a:bodyPr>
+          <a:lstStyle/>
+          <a:p>
+            <a:r>
+              <a:rPr b="1" sz="1400">
+                <a:solidFill>
+                  <a:srgbClr val="202020"/>
+                </a:solidFill>
+              </a:rPr>
+              <a:t>(b)</a:t>
+            </a:r>
+          </a:p>
+        </p:txBody>
+      </p:sp>
     </p:spTree>
   </p:cSld>
   <p:clrMapOvr>
